--- a/무료특강_상세페이지_세로형_편집본.pptx
+++ b/무료특강_상세페이지_세로형_편집본.pptx
@@ -1818,9 +1818,9 @@
                 <a:solidFill>
                   <a:srgbClr val="F0CE72"/>
                 </a:solidFill>
-                <a:latin typeface="Malgun Gothic" pitchFamily="34" charset="0"/>
-                <a:ea typeface="Malgun Gothic" pitchFamily="34" charset="-122"/>
-                <a:cs typeface="Malgun Gothic" pitchFamily="34" charset="-120"/>
+                <a:latin typeface="Pretendard" pitchFamily="34" charset="0"/>
+                <a:ea typeface="Pretendard" pitchFamily="34" charset="-122"/>
+                <a:cs typeface="Pretendard" pitchFamily="34" charset="-120"/>
               </a:rPr>
               <a:t>AI 시대 · 웰니스 전문가를 위한 무료특강</a:t>
             </a:r>
@@ -1860,9 +1860,9 @@
                 <a:solidFill>
                   <a:srgbClr val="FFFFFF"/>
                 </a:solidFill>
-                <a:latin typeface="Malgun Gothic" pitchFamily="34" charset="0"/>
-                <a:ea typeface="Malgun Gothic" pitchFamily="34" charset="-122"/>
-                <a:cs typeface="Malgun Gothic" pitchFamily="34" charset="-120"/>
+                <a:latin typeface="Pretendard" pitchFamily="34" charset="0"/>
+                <a:ea typeface="Pretendard" pitchFamily="34" charset="-122"/>
+                <a:cs typeface="Pretendard" pitchFamily="34" charset="-120"/>
               </a:rPr>
               <a:t>당신의 실력을</a:t>
             </a:r>
@@ -1880,9 +1880,9 @@
                 <a:solidFill>
                   <a:srgbClr val="FFFFFF"/>
                 </a:solidFill>
-                <a:latin typeface="Malgun Gothic" pitchFamily="34" charset="0"/>
-                <a:ea typeface="Malgun Gothic" pitchFamily="34" charset="-122"/>
-                <a:cs typeface="Malgun Gothic" pitchFamily="34" charset="-120"/>
+                <a:latin typeface="Pretendard" pitchFamily="34" charset="0"/>
+                <a:ea typeface="Pretendard" pitchFamily="34" charset="-122"/>
+                <a:cs typeface="Pretendard" pitchFamily="34" charset="-120"/>
               </a:rPr>
               <a:t>세상이 </a:t>
             </a:r>
@@ -1897,9 +1897,9 @@
                 <a:solidFill>
                   <a:srgbClr val="F0CE72"/>
                 </a:solidFill>
-                <a:latin typeface="Malgun Gothic" pitchFamily="34" charset="0"/>
-                <a:ea typeface="Malgun Gothic" pitchFamily="34" charset="-122"/>
-                <a:cs typeface="Malgun Gothic" pitchFamily="34" charset="-120"/>
+                <a:latin typeface="Pretendard" pitchFamily="34" charset="0"/>
+                <a:ea typeface="Pretendard" pitchFamily="34" charset="-122"/>
+                <a:cs typeface="Pretendard" pitchFamily="34" charset="-120"/>
               </a:rPr>
               <a:t>알아보게</a:t>
             </a:r>
@@ -1914,9 +1914,9 @@
                 <a:solidFill>
                   <a:srgbClr val="FFFFFF"/>
                 </a:solidFill>
-                <a:latin typeface="Malgun Gothic" pitchFamily="34" charset="0"/>
-                <a:ea typeface="Malgun Gothic" pitchFamily="34" charset="-122"/>
-                <a:cs typeface="Malgun Gothic" pitchFamily="34" charset="-120"/>
+                <a:latin typeface="Pretendard" pitchFamily="34" charset="0"/>
+                <a:ea typeface="Pretendard" pitchFamily="34" charset="-122"/>
+                <a:cs typeface="Pretendard" pitchFamily="34" charset="-120"/>
               </a:rPr>
               <a:t> 하는 법,</a:t>
             </a:r>
@@ -1934,9 +1934,9 @@
                 <a:solidFill>
                   <a:srgbClr val="FFFFFF"/>
                 </a:solidFill>
-                <a:latin typeface="Malgun Gothic" pitchFamily="34" charset="0"/>
-                <a:ea typeface="Malgun Gothic" pitchFamily="34" charset="-122"/>
-                <a:cs typeface="Malgun Gothic" pitchFamily="34" charset="-120"/>
+                <a:latin typeface="Pretendard" pitchFamily="34" charset="0"/>
+                <a:ea typeface="Pretendard" pitchFamily="34" charset="-122"/>
+                <a:cs typeface="Pretendard" pitchFamily="34" charset="-120"/>
               </a:rPr>
               <a:t>이 한 번의 특강에</a:t>
             </a:r>
@@ -1960,9 +1960,9 @@
                 <a:solidFill>
                   <a:srgbClr val="FFFFFF"/>
                 </a:solidFill>
-                <a:latin typeface="Malgun Gothic" pitchFamily="34" charset="0"/>
-                <a:ea typeface="Malgun Gothic" pitchFamily="34" charset="-122"/>
-                <a:cs typeface="Malgun Gothic" pitchFamily="34" charset="-120"/>
+                <a:latin typeface="Pretendard" pitchFamily="34" charset="0"/>
+                <a:ea typeface="Pretendard" pitchFamily="34" charset="-122"/>
+                <a:cs typeface="Pretendard" pitchFamily="34" charset="-120"/>
               </a:rPr>
               <a:t>다 담았습니다</a:t>
             </a:r>
@@ -2002,9 +2002,9 @@
                 <a:solidFill>
                   <a:srgbClr val="EDE7F6"/>
                 </a:solidFill>
-                <a:latin typeface="Malgun Gothic" pitchFamily="34" charset="0"/>
-                <a:ea typeface="Malgun Gothic" pitchFamily="34" charset="-122"/>
-                <a:cs typeface="Malgun Gothic" pitchFamily="34" charset="-120"/>
+                <a:latin typeface="Pretendard" pitchFamily="34" charset="0"/>
+                <a:ea typeface="Pretendard" pitchFamily="34" charset="-122"/>
+                <a:cs typeface="Pretendard" pitchFamily="34" charset="-120"/>
               </a:rPr>
               <a:t>명상·상담·코칭·요가… 사람을 변화시키는 좋은 일을 하고 계신 당신께.</a:t>
             </a:r>
@@ -2031,9 +2031,9 @@
                 <a:solidFill>
                   <a:srgbClr val="FFFFFF"/>
                 </a:solidFill>
-                <a:latin typeface="Malgun Gothic" pitchFamily="34" charset="0"/>
-                <a:ea typeface="Malgun Gothic" pitchFamily="34" charset="-122"/>
-                <a:cs typeface="Malgun Gothic" pitchFamily="34" charset="-120"/>
+                <a:latin typeface="Pretendard" pitchFamily="34" charset="0"/>
+                <a:ea typeface="Pretendard" pitchFamily="34" charset="-122"/>
+                <a:cs typeface="Pretendard" pitchFamily="34" charset="-120"/>
               </a:rPr>
               <a:t>브랜딩과 콘텐츠의 핵심</a:t>
             </a:r>
@@ -2048,9 +2048,9 @@
                 <a:solidFill>
                   <a:srgbClr val="EDE7F6"/>
                 </a:solidFill>
-                <a:latin typeface="Malgun Gothic" pitchFamily="34" charset="0"/>
-                <a:ea typeface="Malgun Gothic" pitchFamily="34" charset="-122"/>
-                <a:cs typeface="Malgun Gothic" pitchFamily="34" charset="-120"/>
+                <a:latin typeface="Pretendard" pitchFamily="34" charset="0"/>
+                <a:ea typeface="Pretendard" pitchFamily="34" charset="-122"/>
+                <a:cs typeface="Pretendard" pitchFamily="34" charset="-120"/>
               </a:rPr>
               <a:t>을, 아끼지 않고 무료로 공개합니다.</a:t>
             </a:r>
@@ -2087,9 +2087,9 @@
                 <a:solidFill>
                   <a:srgbClr val="7FD1A0"/>
                 </a:solidFill>
-                <a:latin typeface="Malgun Gothic" pitchFamily="34" charset="0"/>
-                <a:ea typeface="Malgun Gothic" pitchFamily="34" charset="-122"/>
-                <a:cs typeface="Malgun Gothic" pitchFamily="34" charset="-120"/>
+                <a:latin typeface="Pretendard" pitchFamily="34" charset="0"/>
+                <a:ea typeface="Pretendard" pitchFamily="34" charset="-122"/>
+                <a:cs typeface="Pretendard" pitchFamily="34" charset="-120"/>
               </a:rPr>
               <a:t>● </a:t>
             </a:r>
@@ -2101,9 +2101,9 @@
                 <a:solidFill>
                   <a:srgbClr val="F8F5FC"/>
                 </a:solidFill>
-                <a:latin typeface="Malgun Gothic" pitchFamily="34" charset="0"/>
-                <a:ea typeface="Malgun Gothic" pitchFamily="34" charset="-122"/>
-                <a:cs typeface="Malgun Gothic" pitchFamily="34" charset="-120"/>
+                <a:latin typeface="Pretendard" pitchFamily="34" charset="0"/>
+                <a:ea typeface="Pretendard" pitchFamily="34" charset="-122"/>
+                <a:cs typeface="Pretendard" pitchFamily="34" charset="-120"/>
               </a:rPr>
               <a:t>100% 무료 · 온라인 라이브</a:t>
             </a:r>
@@ -2169,9 +2169,9 @@
                 <a:solidFill>
                   <a:srgbClr val="2A1A47"/>
                 </a:solidFill>
-                <a:latin typeface="Malgun Gothic" pitchFamily="34" charset="0"/>
-                <a:ea typeface="Malgun Gothic" pitchFamily="34" charset="-122"/>
-                <a:cs typeface="Malgun Gothic" pitchFamily="34" charset="-120"/>
+                <a:latin typeface="Pretendard" pitchFamily="34" charset="0"/>
+                <a:ea typeface="Pretendard" pitchFamily="34" charset="-122"/>
+                <a:cs typeface="Pretendard" pitchFamily="34" charset="-120"/>
               </a:rPr>
               <a:t>무료로 신청하기  →</a:t>
             </a:r>
@@ -2208,9 +2208,9 @@
                 <a:solidFill>
                   <a:srgbClr val="B7ACCB"/>
                 </a:solidFill>
-                <a:latin typeface="Malgun Gothic" pitchFamily="34" charset="0"/>
-                <a:ea typeface="Malgun Gothic" pitchFamily="34" charset="-122"/>
-                <a:cs typeface="Malgun Gothic" pitchFamily="34" charset="-120"/>
+                <a:latin typeface="Pretendard" pitchFamily="34" charset="0"/>
+                <a:ea typeface="Pretendard" pitchFamily="34" charset="-122"/>
+                <a:cs typeface="Pretendard" pitchFamily="34" charset="-120"/>
               </a:rPr>
               <a:t>사전 신청자에게만 참여 링크를 보내드립니다</a:t>
             </a:r>
@@ -2279,9 +2279,9 @@
                 <a:solidFill>
                   <a:srgbClr val="B8862B"/>
                 </a:solidFill>
-                <a:latin typeface="Malgun Gothic" pitchFamily="34" charset="0"/>
-                <a:ea typeface="Malgun Gothic" pitchFamily="34" charset="-122"/>
-                <a:cs typeface="Malgun Gothic" pitchFamily="34" charset="-120"/>
+                <a:latin typeface="Pretendard" pitchFamily="34" charset="0"/>
+                <a:ea typeface="Pretendard" pitchFamily="34" charset="-122"/>
+                <a:cs typeface="Pretendard" pitchFamily="34" charset="-120"/>
               </a:rPr>
               <a:t>먼저 걸어간 분들의 이야기</a:t>
             </a:r>
@@ -2321,9 +2321,9 @@
                 <a:solidFill>
                   <a:srgbClr val="2A2138"/>
                 </a:solidFill>
-                <a:latin typeface="Malgun Gothic" pitchFamily="34" charset="0"/>
-                <a:ea typeface="Malgun Gothic" pitchFamily="34" charset="-122"/>
-                <a:cs typeface="Malgun Gothic" pitchFamily="34" charset="-120"/>
+                <a:latin typeface="Pretendard" pitchFamily="34" charset="0"/>
+                <a:ea typeface="Pretendard" pitchFamily="34" charset="-122"/>
+                <a:cs typeface="Pretendard" pitchFamily="34" charset="-120"/>
               </a:rPr>
               <a:t>“검색해도 안 나오던 제가,</a:t>
             </a:r>
@@ -2341,9 +2341,9 @@
                 <a:solidFill>
                   <a:srgbClr val="2A2138"/>
                 </a:solidFill>
-                <a:latin typeface="Malgun Gothic" pitchFamily="34" charset="0"/>
-                <a:ea typeface="Malgun Gothic" pitchFamily="34" charset="-122"/>
-                <a:cs typeface="Malgun Gothic" pitchFamily="34" charset="-120"/>
+                <a:latin typeface="Pretendard" pitchFamily="34" charset="0"/>
+                <a:ea typeface="Pretendard" pitchFamily="34" charset="-122"/>
+                <a:cs typeface="Pretendard" pitchFamily="34" charset="-120"/>
               </a:rPr>
               <a:t>이렇게 달라졌습니다”</a:t>
             </a:r>
@@ -2414,9 +2414,9 @@
                 <a:solidFill>
                   <a:srgbClr val="B8862B"/>
                 </a:solidFill>
-                <a:latin typeface="Malgun Gothic" pitchFamily="34" charset="0"/>
-                <a:ea typeface="Malgun Gothic" pitchFamily="34" charset="-122"/>
-                <a:cs typeface="Malgun Gothic" pitchFamily="34" charset="-120"/>
+                <a:latin typeface="Pretendard" pitchFamily="34" charset="0"/>
+                <a:ea typeface="Pretendard" pitchFamily="34" charset="-122"/>
+                <a:cs typeface="Pretendard" pitchFamily="34" charset="-120"/>
               </a:rPr>
               <a:t>★★★★★</a:t>
             </a:r>
@@ -2456,9 +2456,9 @@
                 <a:solidFill>
                   <a:srgbClr val="2A2138"/>
                 </a:solidFill>
-                <a:latin typeface="Malgun Gothic" pitchFamily="34" charset="0"/>
-                <a:ea typeface="Malgun Gothic" pitchFamily="34" charset="-122"/>
-                <a:cs typeface="Malgun Gothic" pitchFamily="34" charset="-120"/>
+                <a:latin typeface="Pretendard" pitchFamily="34" charset="0"/>
+                <a:ea typeface="Pretendard" pitchFamily="34" charset="-122"/>
+                <a:cs typeface="Pretendard" pitchFamily="34" charset="-120"/>
               </a:rPr>
               <a:t>막연히 SNS를 해야 한다고만 생각했는데, 어떤 순서로 해야 하는지가 처음으로 선명해졌어요. 블로그를 정리하고 나니 공공기관에서 먼저 강의 문의가 왔습니다.</a:t>
             </a:r>
@@ -2515,9 +2515,9 @@
                 <a:solidFill>
                   <a:srgbClr val="FFFFFF"/>
                 </a:solidFill>
-                <a:latin typeface="Malgun Gothic" pitchFamily="34" charset="0"/>
-                <a:ea typeface="Malgun Gothic" pitchFamily="34" charset="-122"/>
-                <a:cs typeface="Malgun Gothic" pitchFamily="34" charset="-120"/>
+                <a:latin typeface="Pretendard" pitchFamily="34" charset="0"/>
+                <a:ea typeface="Pretendard" pitchFamily="34" charset="-122"/>
+                <a:cs typeface="Pretendard" pitchFamily="34" charset="-120"/>
               </a:rPr>
               <a:t>김</a:t>
             </a:r>
@@ -2554,9 +2554,9 @@
                 <a:solidFill>
                   <a:srgbClr val="544A63"/>
                 </a:solidFill>
-                <a:latin typeface="Malgun Gothic" pitchFamily="34" charset="0"/>
-                <a:ea typeface="Malgun Gothic" pitchFamily="34" charset="-122"/>
-                <a:cs typeface="Malgun Gothic" pitchFamily="34" charset="-120"/>
+                <a:latin typeface="Pretendard" pitchFamily="34" charset="0"/>
+                <a:ea typeface="Pretendard" pitchFamily="34" charset="-122"/>
+                <a:cs typeface="Pretendard" pitchFamily="34" charset="-120"/>
               </a:rPr>
               <a:t>김○○ 님 · 명상 지도자 8년 차</a:t>
             </a:r>
@@ -2627,9 +2627,9 @@
                 <a:solidFill>
                   <a:srgbClr val="B8862B"/>
                 </a:solidFill>
-                <a:latin typeface="Malgun Gothic" pitchFamily="34" charset="0"/>
-                <a:ea typeface="Malgun Gothic" pitchFamily="34" charset="-122"/>
-                <a:cs typeface="Malgun Gothic" pitchFamily="34" charset="-120"/>
+                <a:latin typeface="Pretendard" pitchFamily="34" charset="0"/>
+                <a:ea typeface="Pretendard" pitchFamily="34" charset="-122"/>
+                <a:cs typeface="Pretendard" pitchFamily="34" charset="-120"/>
               </a:rPr>
               <a:t>★★★★★</a:t>
             </a:r>
@@ -2669,9 +2669,9 @@
                 <a:solidFill>
                   <a:srgbClr val="2A2138"/>
                 </a:solidFill>
-                <a:latin typeface="Malgun Gothic" pitchFamily="34" charset="0"/>
-                <a:ea typeface="Malgun Gothic" pitchFamily="34" charset="-122"/>
-                <a:cs typeface="Malgun Gothic" pitchFamily="34" charset="-120"/>
+                <a:latin typeface="Pretendard" pitchFamily="34" charset="0"/>
+                <a:ea typeface="Pretendard" pitchFamily="34" charset="-122"/>
+                <a:cs typeface="Pretendard" pitchFamily="34" charset="-120"/>
               </a:rPr>
               <a:t>아이 셋 키우는 평범한 엄마였는데, 글쓰기부터 시작해 책을 내고 전국으로 강의를 다니게 됐어요. ‘나를 알리는 구조’가 이렇게 중요한 줄 몰랐습니다.</a:t>
             </a:r>
@@ -2728,9 +2728,9 @@
                 <a:solidFill>
                   <a:srgbClr val="FFFFFF"/>
                 </a:solidFill>
-                <a:latin typeface="Malgun Gothic" pitchFamily="34" charset="0"/>
-                <a:ea typeface="Malgun Gothic" pitchFamily="34" charset="-122"/>
-                <a:cs typeface="Malgun Gothic" pitchFamily="34" charset="-120"/>
+                <a:latin typeface="Pretendard" pitchFamily="34" charset="0"/>
+                <a:ea typeface="Pretendard" pitchFamily="34" charset="-122"/>
+                <a:cs typeface="Pretendard" pitchFamily="34" charset="-120"/>
               </a:rPr>
               <a:t>이</a:t>
             </a:r>
@@ -2767,9 +2767,9 @@
                 <a:solidFill>
                   <a:srgbClr val="544A63"/>
                 </a:solidFill>
-                <a:latin typeface="Malgun Gothic" pitchFamily="34" charset="0"/>
-                <a:ea typeface="Malgun Gothic" pitchFamily="34" charset="-122"/>
-                <a:cs typeface="Malgun Gothic" pitchFamily="34" charset="-120"/>
+                <a:latin typeface="Pretendard" pitchFamily="34" charset="0"/>
+                <a:ea typeface="Pretendard" pitchFamily="34" charset="-122"/>
+                <a:cs typeface="Pretendard" pitchFamily="34" charset="-120"/>
               </a:rPr>
               <a:t>이○○ 님 · 웰니스 코치, 저자</a:t>
             </a:r>
@@ -2840,9 +2840,9 @@
                 <a:solidFill>
                   <a:srgbClr val="B8862B"/>
                 </a:solidFill>
-                <a:latin typeface="Malgun Gothic" pitchFamily="34" charset="0"/>
-                <a:ea typeface="Malgun Gothic" pitchFamily="34" charset="-122"/>
-                <a:cs typeface="Malgun Gothic" pitchFamily="34" charset="-120"/>
+                <a:latin typeface="Pretendard" pitchFamily="34" charset="0"/>
+                <a:ea typeface="Pretendard" pitchFamily="34" charset="-122"/>
+                <a:cs typeface="Pretendard" pitchFamily="34" charset="-120"/>
               </a:rPr>
               <a:t>★★★★★</a:t>
             </a:r>
@@ -2882,9 +2882,9 @@
                 <a:solidFill>
                   <a:srgbClr val="2A2138"/>
                 </a:solidFill>
-                <a:latin typeface="Malgun Gothic" pitchFamily="34" charset="0"/>
-                <a:ea typeface="Malgun Gothic" pitchFamily="34" charset="-122"/>
-                <a:cs typeface="Malgun Gothic" pitchFamily="34" charset="-120"/>
+                <a:latin typeface="Pretendard" pitchFamily="34" charset="0"/>
+                <a:ea typeface="Pretendard" pitchFamily="34" charset="-122"/>
+                <a:cs typeface="Pretendard" pitchFamily="34" charset="-120"/>
               </a:rPr>
               <a:t>‘자극적인 마케팅을 하라’고 하지 않는다는 점이 가장 좋았어요. 명상하는 제 결에 맞는 방식으로 진정성을 지키면서 사람들에게 닿는 법을 배웠습니다.</a:t>
             </a:r>
@@ -2941,9 +2941,9 @@
                 <a:solidFill>
                   <a:srgbClr val="FFFFFF"/>
                 </a:solidFill>
-                <a:latin typeface="Malgun Gothic" pitchFamily="34" charset="0"/>
-                <a:ea typeface="Malgun Gothic" pitchFamily="34" charset="-122"/>
-                <a:cs typeface="Malgun Gothic" pitchFamily="34" charset="-120"/>
+                <a:latin typeface="Pretendard" pitchFamily="34" charset="0"/>
+                <a:ea typeface="Pretendard" pitchFamily="34" charset="-122"/>
+                <a:cs typeface="Pretendard" pitchFamily="34" charset="-120"/>
               </a:rPr>
               <a:t>박</a:t>
             </a:r>
@@ -2980,9 +2980,9 @@
                 <a:solidFill>
                   <a:srgbClr val="544A63"/>
                 </a:solidFill>
-                <a:latin typeface="Malgun Gothic" pitchFamily="34" charset="0"/>
-                <a:ea typeface="Malgun Gothic" pitchFamily="34" charset="-122"/>
-                <a:cs typeface="Malgun Gothic" pitchFamily="34" charset="-120"/>
+                <a:latin typeface="Pretendard" pitchFamily="34" charset="0"/>
+                <a:ea typeface="Pretendard" pitchFamily="34" charset="-122"/>
+                <a:cs typeface="Pretendard" pitchFamily="34" charset="-120"/>
               </a:rPr>
               <a:t>박○○ 님 · 요가·명상 스튜디오 운영</a:t>
             </a:r>
@@ -3046,9 +3046,9 @@
                 <a:solidFill>
                   <a:srgbClr val="4E2E82"/>
                 </a:solidFill>
-                <a:latin typeface="Malgun Gothic" pitchFamily="34" charset="0"/>
-                <a:ea typeface="Malgun Gothic" pitchFamily="34" charset="-122"/>
-                <a:cs typeface="Malgun Gothic" pitchFamily="34" charset="-120"/>
+                <a:latin typeface="Pretendard" pitchFamily="34" charset="0"/>
+                <a:ea typeface="Pretendard" pitchFamily="34" charset="-122"/>
+                <a:cs typeface="Pretendard" pitchFamily="34" charset="-120"/>
               </a:rPr>
               <a:t>1,000+</a:t>
             </a:r>
@@ -3085,9 +3085,9 @@
                 <a:solidFill>
                   <a:srgbClr val="544A63"/>
                 </a:solidFill>
-                <a:latin typeface="Malgun Gothic" pitchFamily="34" charset="0"/>
-                <a:ea typeface="Malgun Gothic" pitchFamily="34" charset="-122"/>
-                <a:cs typeface="Malgun Gothic" pitchFamily="34" charset="-120"/>
+                <a:latin typeface="Pretendard" pitchFamily="34" charset="0"/>
+                <a:ea typeface="Pretendard" pitchFamily="34" charset="-122"/>
+                <a:cs typeface="Pretendard" pitchFamily="34" charset="-120"/>
               </a:rPr>
               <a:t>누적 수강생</a:t>
             </a:r>
@@ -3151,9 +3151,9 @@
                 <a:solidFill>
                   <a:srgbClr val="4E2E82"/>
                 </a:solidFill>
-                <a:latin typeface="Malgun Gothic" pitchFamily="34" charset="0"/>
-                <a:ea typeface="Malgun Gothic" pitchFamily="34" charset="-122"/>
-                <a:cs typeface="Malgun Gothic" pitchFamily="34" charset="-120"/>
+                <a:latin typeface="Pretendard" pitchFamily="34" charset="0"/>
+                <a:ea typeface="Pretendard" pitchFamily="34" charset="-122"/>
+                <a:cs typeface="Pretendard" pitchFamily="34" charset="-120"/>
               </a:rPr>
               <a:t>4년</a:t>
             </a:r>
@@ -3190,9 +3190,9 @@
                 <a:solidFill>
                   <a:srgbClr val="544A63"/>
                 </a:solidFill>
-                <a:latin typeface="Malgun Gothic" pitchFamily="34" charset="0"/>
-                <a:ea typeface="Malgun Gothic" pitchFamily="34" charset="-122"/>
-                <a:cs typeface="Malgun Gothic" pitchFamily="34" charset="-120"/>
+                <a:latin typeface="Pretendard" pitchFamily="34" charset="0"/>
+                <a:ea typeface="Pretendard" pitchFamily="34" charset="-122"/>
+                <a:cs typeface="Pretendard" pitchFamily="34" charset="-120"/>
               </a:rPr>
               <a:t>웰니스 특화 교육</a:t>
             </a:r>
@@ -3256,9 +3256,9 @@
                 <a:solidFill>
                   <a:srgbClr val="4E2E82"/>
                 </a:solidFill>
-                <a:latin typeface="Malgun Gothic" pitchFamily="34" charset="0"/>
-                <a:ea typeface="Malgun Gothic" pitchFamily="34" charset="-122"/>
-                <a:cs typeface="Malgun Gothic" pitchFamily="34" charset="-120"/>
+                <a:latin typeface="Pretendard" pitchFamily="34" charset="0"/>
+                <a:ea typeface="Pretendard" pitchFamily="34" charset="-122"/>
+                <a:cs typeface="Pretendard" pitchFamily="34" charset="-120"/>
               </a:rPr>
               <a:t>5권</a:t>
             </a:r>
@@ -3295,9 +3295,9 @@
                 <a:solidFill>
                   <a:srgbClr val="544A63"/>
                 </a:solidFill>
-                <a:latin typeface="Malgun Gothic" pitchFamily="34" charset="0"/>
-                <a:ea typeface="Malgun Gothic" pitchFamily="34" charset="-122"/>
-                <a:cs typeface="Malgun Gothic" pitchFamily="34" charset="-120"/>
+                <a:latin typeface="Pretendard" pitchFamily="34" charset="0"/>
+                <a:ea typeface="Pretendard" pitchFamily="34" charset="-122"/>
+                <a:cs typeface="Pretendard" pitchFamily="34" charset="-120"/>
               </a:rPr>
               <a:t>강사 저서 출간</a:t>
             </a:r>
@@ -3369,9 +3369,9 @@
                 <a:solidFill>
                   <a:srgbClr val="FFFFFF"/>
                 </a:solidFill>
-                <a:latin typeface="Malgun Gothic" pitchFamily="34" charset="0"/>
-                <a:ea typeface="Malgun Gothic" pitchFamily="34" charset="-122"/>
-                <a:cs typeface="Malgun Gothic" pitchFamily="34" charset="-120"/>
+                <a:latin typeface="Pretendard" pitchFamily="34" charset="0"/>
+                <a:ea typeface="Pretendard" pitchFamily="34" charset="-122"/>
+                <a:cs typeface="Pretendard" pitchFamily="34" charset="-120"/>
               </a:rPr>
               <a:t>이제, 당신의 실력이</a:t>
             </a:r>
@@ -3389,9 +3389,9 @@
                 <a:solidFill>
                   <a:srgbClr val="FFFFFF"/>
                 </a:solidFill>
-                <a:latin typeface="Malgun Gothic" pitchFamily="34" charset="0"/>
-                <a:ea typeface="Malgun Gothic" pitchFamily="34" charset="-122"/>
-                <a:cs typeface="Malgun Gothic" pitchFamily="34" charset="-120"/>
+                <a:latin typeface="Pretendard" pitchFamily="34" charset="0"/>
+                <a:ea typeface="Pretendard" pitchFamily="34" charset="-122"/>
+                <a:cs typeface="Pretendard" pitchFamily="34" charset="-120"/>
               </a:rPr>
               <a:t>제대로 알려질 차례입니다</a:t>
             </a:r>
@@ -3431,9 +3431,9 @@
                 <a:solidFill>
                   <a:srgbClr val="EDE7F6"/>
                 </a:solidFill>
-                <a:latin typeface="Malgun Gothic" pitchFamily="34" charset="0"/>
-                <a:ea typeface="Malgun Gothic" pitchFamily="34" charset="-122"/>
-                <a:cs typeface="Malgun Gothic" pitchFamily="34" charset="-120"/>
+                <a:latin typeface="Pretendard" pitchFamily="34" charset="0"/>
+                <a:ea typeface="Pretendard" pitchFamily="34" charset="-122"/>
+                <a:cs typeface="Pretendard" pitchFamily="34" charset="-120"/>
               </a:rPr>
               <a:t>혼자 고민하던 시간을 여기서 멈추세요.</a:t>
             </a:r>
@@ -3451,9 +3451,9 @@
                 <a:solidFill>
                   <a:srgbClr val="EDE7F6"/>
                 </a:solidFill>
-                <a:latin typeface="Malgun Gothic" pitchFamily="34" charset="0"/>
-                <a:ea typeface="Malgun Gothic" pitchFamily="34" charset="-122"/>
-                <a:cs typeface="Malgun Gothic" pitchFamily="34" charset="-120"/>
+                <a:latin typeface="Pretendard" pitchFamily="34" charset="0"/>
+                <a:ea typeface="Pretendard" pitchFamily="34" charset="-122"/>
+                <a:cs typeface="Pretendard" pitchFamily="34" charset="-120"/>
               </a:rPr>
               <a:t>꼭 알아야 할 핵심을, 무료로 모두 가져가세요.</a:t>
             </a:r>
@@ -3517,9 +3517,9 @@
                 <a:solidFill>
                   <a:srgbClr val="F0CE72"/>
                 </a:solidFill>
-                <a:latin typeface="Malgun Gothic" pitchFamily="34" charset="0"/>
-                <a:ea typeface="Malgun Gothic" pitchFamily="34" charset="-122"/>
-                <a:cs typeface="Malgun Gothic" pitchFamily="34" charset="-120"/>
+                <a:latin typeface="Pretendard" pitchFamily="34" charset="0"/>
+                <a:ea typeface="Pretendard" pitchFamily="34" charset="-122"/>
+                <a:cs typeface="Pretendard" pitchFamily="34" charset="-120"/>
               </a:rPr>
               <a:t>일정</a:t>
             </a:r>
@@ -3556,9 +3556,9 @@
                 <a:solidFill>
                   <a:srgbClr val="F3EFE6"/>
                 </a:solidFill>
-                <a:latin typeface="Malgun Gothic" pitchFamily="34" charset="0"/>
-                <a:ea typeface="Malgun Gothic" pitchFamily="34" charset="-122"/>
-                <a:cs typeface="Malgun Gothic" pitchFamily="34" charset="-120"/>
+                <a:latin typeface="Pretendard" pitchFamily="34" charset="0"/>
+                <a:ea typeface="Pretendard" pitchFamily="34" charset="-122"/>
+                <a:cs typeface="Pretendard" pitchFamily="34" charset="-120"/>
               </a:rPr>
               <a:t>2026년 6월 18일(목) 저녁 8:00 – 9:30</a:t>
             </a:r>
@@ -3618,9 +3618,9 @@
                 <a:solidFill>
                   <a:srgbClr val="F0CE72"/>
                 </a:solidFill>
-                <a:latin typeface="Malgun Gothic" pitchFamily="34" charset="0"/>
-                <a:ea typeface="Malgun Gothic" pitchFamily="34" charset="-122"/>
-                <a:cs typeface="Malgun Gothic" pitchFamily="34" charset="-120"/>
+                <a:latin typeface="Pretendard" pitchFamily="34" charset="0"/>
+                <a:ea typeface="Pretendard" pitchFamily="34" charset="-122"/>
+                <a:cs typeface="Pretendard" pitchFamily="34" charset="-120"/>
               </a:rPr>
               <a:t>장소</a:t>
             </a:r>
@@ -3657,9 +3657,9 @@
                 <a:solidFill>
                   <a:srgbClr val="F3EFE6"/>
                 </a:solidFill>
-                <a:latin typeface="Malgun Gothic" pitchFamily="34" charset="0"/>
-                <a:ea typeface="Malgun Gothic" pitchFamily="34" charset="-122"/>
-                <a:cs typeface="Malgun Gothic" pitchFamily="34" charset="-120"/>
+                <a:latin typeface="Pretendard" pitchFamily="34" charset="0"/>
+                <a:ea typeface="Pretendard" pitchFamily="34" charset="-122"/>
+                <a:cs typeface="Pretendard" pitchFamily="34" charset="-120"/>
               </a:rPr>
               <a:t>온라인 줌(ZOOM) 라이브</a:t>
             </a:r>
@@ -3719,9 +3719,9 @@
                 <a:solidFill>
                   <a:srgbClr val="F0CE72"/>
                 </a:solidFill>
-                <a:latin typeface="Malgun Gothic" pitchFamily="34" charset="0"/>
-                <a:ea typeface="Malgun Gothic" pitchFamily="34" charset="-122"/>
-                <a:cs typeface="Malgun Gothic" pitchFamily="34" charset="-120"/>
+                <a:latin typeface="Pretendard" pitchFamily="34" charset="0"/>
+                <a:ea typeface="Pretendard" pitchFamily="34" charset="-122"/>
+                <a:cs typeface="Pretendard" pitchFamily="34" charset="-120"/>
               </a:rPr>
               <a:t>대상</a:t>
             </a:r>
@@ -3758,9 +3758,9 @@
                 <a:solidFill>
                   <a:srgbClr val="F3EFE6"/>
                 </a:solidFill>
-                <a:latin typeface="Malgun Gothic" pitchFamily="34" charset="0"/>
-                <a:ea typeface="Malgun Gothic" pitchFamily="34" charset="-122"/>
-                <a:cs typeface="Malgun Gothic" pitchFamily="34" charset="-120"/>
+                <a:latin typeface="Pretendard" pitchFamily="34" charset="0"/>
+                <a:ea typeface="Pretendard" pitchFamily="34" charset="-122"/>
+                <a:cs typeface="Pretendard" pitchFamily="34" charset="-120"/>
               </a:rPr>
               <a:t>명상·상담·코칭·요가 등 웰니스 전문가</a:t>
             </a:r>
@@ -3820,9 +3820,9 @@
                 <a:solidFill>
                   <a:srgbClr val="F0CE72"/>
                 </a:solidFill>
-                <a:latin typeface="Malgun Gothic" pitchFamily="34" charset="0"/>
-                <a:ea typeface="Malgun Gothic" pitchFamily="34" charset="-122"/>
-                <a:cs typeface="Malgun Gothic" pitchFamily="34" charset="-120"/>
+                <a:latin typeface="Pretendard" pitchFamily="34" charset="0"/>
+                <a:ea typeface="Pretendard" pitchFamily="34" charset="-122"/>
+                <a:cs typeface="Pretendard" pitchFamily="34" charset="-120"/>
               </a:rPr>
               <a:t>수강료</a:t>
             </a:r>
@@ -3859,9 +3859,9 @@
                 <a:solidFill>
                   <a:srgbClr val="F3EFE6"/>
                 </a:solidFill>
-                <a:latin typeface="Malgun Gothic" pitchFamily="34" charset="0"/>
-                <a:ea typeface="Malgun Gothic" pitchFamily="34" charset="-122"/>
-                <a:cs typeface="Malgun Gothic" pitchFamily="34" charset="-120"/>
+                <a:latin typeface="Pretendard" pitchFamily="34" charset="0"/>
+                <a:ea typeface="Pretendard" pitchFamily="34" charset="-122"/>
+                <a:cs typeface="Pretendard" pitchFamily="34" charset="-120"/>
               </a:rPr>
               <a:t>무료 · 사전 신청자 한정 링크 발송</a:t>
             </a:r>
@@ -3950,9 +3950,9 @@
                 <a:solidFill>
                   <a:srgbClr val="2A1A47"/>
                 </a:solidFill>
-                <a:latin typeface="Malgun Gothic" pitchFamily="34" charset="0"/>
-                <a:ea typeface="Malgun Gothic" pitchFamily="34" charset="-122"/>
-                <a:cs typeface="Malgun Gothic" pitchFamily="34" charset="-120"/>
+                <a:latin typeface="Pretendard" pitchFamily="34" charset="0"/>
+                <a:ea typeface="Pretendard" pitchFamily="34" charset="-122"/>
+                <a:cs typeface="Pretendard" pitchFamily="34" charset="-120"/>
               </a:rPr>
               <a:t>무료로 사전등록하기  →</a:t>
             </a:r>
@@ -3989,9 +3989,9 @@
                 <a:solidFill>
                   <a:srgbClr val="B7ACCB"/>
                 </a:solidFill>
-                <a:latin typeface="Malgun Gothic" pitchFamily="34" charset="0"/>
-                <a:ea typeface="Malgun Gothic" pitchFamily="34" charset="-122"/>
-                <a:cs typeface="Malgun Gothic" pitchFamily="34" charset="-120"/>
+                <a:latin typeface="Pretendard" pitchFamily="34" charset="0"/>
+                <a:ea typeface="Pretendard" pitchFamily="34" charset="-122"/>
+                <a:cs typeface="Pretendard" pitchFamily="34" charset="-120"/>
               </a:rPr>
               <a:t>원활한 질의응답과 밀도 높은 진행을 위해, 선착순 한정 인원으로 모십니다.</a:t>
             </a:r>
@@ -4028,9 +4028,9 @@
                 <a:solidFill>
                   <a:srgbClr val="8A7BA8"/>
                 </a:solidFill>
-                <a:latin typeface="Malgun Gothic" pitchFamily="34" charset="0"/>
-                <a:ea typeface="Malgun Gothic" pitchFamily="34" charset="-122"/>
-                <a:cs typeface="Malgun Gothic" pitchFamily="34" charset="-120"/>
+                <a:latin typeface="Pretendard" pitchFamily="34" charset="0"/>
+                <a:ea typeface="Pretendard" pitchFamily="34" charset="-122"/>
+                <a:cs typeface="Pretendard" pitchFamily="34" charset="-120"/>
               </a:rPr>
               <a:t>주최 · 힐링뉴스 &amp; 메디에이치(MEDI.H)   |   © 2026 Healing News</a:t>
             </a:r>
@@ -4099,9 +4099,9 @@
                 <a:solidFill>
                   <a:srgbClr val="B8862B"/>
                 </a:solidFill>
-                <a:latin typeface="Malgun Gothic" pitchFamily="34" charset="0"/>
-                <a:ea typeface="Malgun Gothic" pitchFamily="34" charset="-122"/>
-                <a:cs typeface="Malgun Gothic" pitchFamily="34" charset="-120"/>
+                <a:latin typeface="Pretendard" pitchFamily="34" charset="0"/>
+                <a:ea typeface="Pretendard" pitchFamily="34" charset="-122"/>
+                <a:cs typeface="Pretendard" pitchFamily="34" charset="-120"/>
               </a:rPr>
               <a:t>이런 마음, 익숙하신가요</a:t>
             </a:r>
@@ -4141,9 +4141,9 @@
                 <a:solidFill>
                   <a:srgbClr val="2A2138"/>
                 </a:solidFill>
-                <a:latin typeface="Malgun Gothic" pitchFamily="34" charset="0"/>
-                <a:ea typeface="Malgun Gothic" pitchFamily="34" charset="-122"/>
-                <a:cs typeface="Malgun Gothic" pitchFamily="34" charset="-120"/>
+                <a:latin typeface="Pretendard" pitchFamily="34" charset="0"/>
+                <a:ea typeface="Pretendard" pitchFamily="34" charset="-122"/>
+                <a:cs typeface="Pretendard" pitchFamily="34" charset="-120"/>
               </a:rPr>
               <a:t>수업은 좋은데,</a:t>
             </a:r>
@@ -4161,9 +4161,9 @@
                 <a:solidFill>
                   <a:srgbClr val="2A2138"/>
                 </a:solidFill>
-                <a:latin typeface="Malgun Gothic" pitchFamily="34" charset="0"/>
-                <a:ea typeface="Malgun Gothic" pitchFamily="34" charset="-122"/>
-                <a:cs typeface="Malgun Gothic" pitchFamily="34" charset="-120"/>
+                <a:latin typeface="Pretendard" pitchFamily="34" charset="0"/>
+                <a:ea typeface="Pretendard" pitchFamily="34" charset="-122"/>
+                <a:cs typeface="Pretendard" pitchFamily="34" charset="-120"/>
               </a:rPr>
               <a:t>나를 아는 사람이 없습니다</a:t>
             </a:r>
@@ -4237,9 +4237,9 @@
                 <a:solidFill>
                   <a:srgbClr val="4E2E82"/>
                 </a:solidFill>
-                <a:latin typeface="Malgun Gothic" pitchFamily="34" charset="0"/>
-                <a:ea typeface="Malgun Gothic" pitchFamily="34" charset="-122"/>
-                <a:cs typeface="Malgun Gothic" pitchFamily="34" charset="-120"/>
+                <a:latin typeface="Pretendard" pitchFamily="34" charset="0"/>
+                <a:ea typeface="Pretendard" pitchFamily="34" charset="-122"/>
+                <a:cs typeface="Pretendard" pitchFamily="34" charset="-120"/>
               </a:rPr>
               <a:t>✓  </a:t>
             </a:r>
@@ -4254,9 +4254,9 @@
                 <a:solidFill>
                   <a:srgbClr val="2A2138"/>
                 </a:solidFill>
-                <a:latin typeface="Malgun Gothic" pitchFamily="34" charset="0"/>
-                <a:ea typeface="Malgun Gothic" pitchFamily="34" charset="-122"/>
-                <a:cs typeface="Malgun Gothic" pitchFamily="34" charset="-120"/>
+                <a:latin typeface="Pretendard" pitchFamily="34" charset="0"/>
+                <a:ea typeface="Pretendard" pitchFamily="34" charset="-122"/>
+                <a:cs typeface="Pretendard" pitchFamily="34" charset="-120"/>
               </a:rPr>
               <a:t>수업 만족도는 높은데, 새 기수 모집은 늘 처음부터 어렵다.</a:t>
             </a:r>
@@ -4330,9 +4330,9 @@
                 <a:solidFill>
                   <a:srgbClr val="4E2E82"/>
                 </a:solidFill>
-                <a:latin typeface="Malgun Gothic" pitchFamily="34" charset="0"/>
-                <a:ea typeface="Malgun Gothic" pitchFamily="34" charset="-122"/>
-                <a:cs typeface="Malgun Gothic" pitchFamily="34" charset="-120"/>
+                <a:latin typeface="Pretendard" pitchFamily="34" charset="0"/>
+                <a:ea typeface="Pretendard" pitchFamily="34" charset="-122"/>
+                <a:cs typeface="Pretendard" pitchFamily="34" charset="-120"/>
               </a:rPr>
               <a:t>✓  </a:t>
             </a:r>
@@ -4347,9 +4347,9 @@
                 <a:solidFill>
                   <a:srgbClr val="2A2138"/>
                 </a:solidFill>
-                <a:latin typeface="Malgun Gothic" pitchFamily="34" charset="0"/>
-                <a:ea typeface="Malgun Gothic" pitchFamily="34" charset="-122"/>
-                <a:cs typeface="Malgun Gothic" pitchFamily="34" charset="-120"/>
+                <a:latin typeface="Pretendard" pitchFamily="34" charset="0"/>
+                <a:ea typeface="Pretendard" pitchFamily="34" charset="-122"/>
+                <a:cs typeface="Pretendard" pitchFamily="34" charset="-120"/>
               </a:rPr>
               <a:t>SNS를 해야 한다는 건 아는데, 무엇부터 어떻게 할지 막막하다.</a:t>
             </a:r>
@@ -4423,9 +4423,9 @@
                 <a:solidFill>
                   <a:srgbClr val="4E2E82"/>
                 </a:solidFill>
-                <a:latin typeface="Malgun Gothic" pitchFamily="34" charset="0"/>
-                <a:ea typeface="Malgun Gothic" pitchFamily="34" charset="-122"/>
-                <a:cs typeface="Malgun Gothic" pitchFamily="34" charset="-120"/>
+                <a:latin typeface="Pretendard" pitchFamily="34" charset="0"/>
+                <a:ea typeface="Pretendard" pitchFamily="34" charset="-122"/>
+                <a:cs typeface="Pretendard" pitchFamily="34" charset="-120"/>
               </a:rPr>
               <a:t>✓  </a:t>
             </a:r>
@@ -4440,9 +4440,9 @@
                 <a:solidFill>
                   <a:srgbClr val="2A2138"/>
                 </a:solidFill>
-                <a:latin typeface="Malgun Gothic" pitchFamily="34" charset="0"/>
-                <a:ea typeface="Malgun Gothic" pitchFamily="34" charset="-122"/>
-                <a:cs typeface="Malgun Gothic" pitchFamily="34" charset="-120"/>
+                <a:latin typeface="Pretendard" pitchFamily="34" charset="0"/>
+                <a:ea typeface="Pretendard" pitchFamily="34" charset="-122"/>
+                <a:cs typeface="Pretendard" pitchFamily="34" charset="-120"/>
               </a:rPr>
               <a:t>AI가 중요하다지만, 내 일에 어떻게 써야 할지 감이 오지 않는다.</a:t>
             </a:r>
@@ -4516,9 +4516,9 @@
                 <a:solidFill>
                   <a:srgbClr val="4E2E82"/>
                 </a:solidFill>
-                <a:latin typeface="Malgun Gothic" pitchFamily="34" charset="0"/>
-                <a:ea typeface="Malgun Gothic" pitchFamily="34" charset="-122"/>
-                <a:cs typeface="Malgun Gothic" pitchFamily="34" charset="-120"/>
+                <a:latin typeface="Pretendard" pitchFamily="34" charset="0"/>
+                <a:ea typeface="Pretendard" pitchFamily="34" charset="-122"/>
+                <a:cs typeface="Pretendard" pitchFamily="34" charset="-120"/>
               </a:rPr>
               <a:t>✓  </a:t>
             </a:r>
@@ -4533,9 +4533,9 @@
                 <a:solidFill>
                   <a:srgbClr val="2A2138"/>
                 </a:solidFill>
-                <a:latin typeface="Malgun Gothic" pitchFamily="34" charset="0"/>
-                <a:ea typeface="Malgun Gothic" pitchFamily="34" charset="-122"/>
-                <a:cs typeface="Malgun Gothic" pitchFamily="34" charset="-120"/>
+                <a:latin typeface="Pretendard" pitchFamily="34" charset="0"/>
+                <a:ea typeface="Pretendard" pitchFamily="34" charset="-122"/>
+                <a:cs typeface="Pretendard" pitchFamily="34" charset="-120"/>
               </a:rPr>
               <a:t>내 이름을 검색해도, 나오는 것이 거의 없다.</a:t>
             </a:r>
@@ -4609,9 +4609,9 @@
                 <a:solidFill>
                   <a:srgbClr val="4E2E82"/>
                 </a:solidFill>
-                <a:latin typeface="Malgun Gothic" pitchFamily="34" charset="0"/>
-                <a:ea typeface="Malgun Gothic" pitchFamily="34" charset="-122"/>
-                <a:cs typeface="Malgun Gothic" pitchFamily="34" charset="-120"/>
+                <a:latin typeface="Pretendard" pitchFamily="34" charset="0"/>
+                <a:ea typeface="Pretendard" pitchFamily="34" charset="-122"/>
+                <a:cs typeface="Pretendard" pitchFamily="34" charset="-120"/>
               </a:rPr>
               <a:t>✓  </a:t>
             </a:r>
@@ -4626,9 +4626,9 @@
                 <a:solidFill>
                   <a:srgbClr val="2A2138"/>
                 </a:solidFill>
-                <a:latin typeface="Malgun Gothic" pitchFamily="34" charset="0"/>
-                <a:ea typeface="Malgun Gothic" pitchFamily="34" charset="-122"/>
-                <a:cs typeface="Malgun Gothic" pitchFamily="34" charset="-120"/>
+                <a:latin typeface="Pretendard" pitchFamily="34" charset="0"/>
+                <a:ea typeface="Pretendard" pitchFamily="34" charset="-122"/>
+                <a:cs typeface="Pretendard" pitchFamily="34" charset="-120"/>
               </a:rPr>
               <a:t>좋아하는 일을 하면서, 마음도 살림도 편안해지고 싶다.</a:t>
             </a:r>
@@ -4665,9 +4665,9 @@
                 <a:solidFill>
                   <a:srgbClr val="4E2E82"/>
                 </a:solidFill>
-                <a:latin typeface="Malgun Gothic" pitchFamily="34" charset="0"/>
-                <a:ea typeface="Malgun Gothic" pitchFamily="34" charset="-122"/>
-                <a:cs typeface="Malgun Gothic" pitchFamily="34" charset="-120"/>
+                <a:latin typeface="Pretendard" pitchFamily="34" charset="0"/>
+                <a:ea typeface="Pretendard" pitchFamily="34" charset="-122"/>
+                <a:cs typeface="Pretendard" pitchFamily="34" charset="-120"/>
               </a:rPr>
               <a:t>하나라도 고개가 끄덕여졌다면, 이 시간은 당신을 위한 자리입니다.</a:t>
             </a:r>
@@ -4739,9 +4739,9 @@
                 <a:solidFill>
                   <a:srgbClr val="EDE7F6"/>
                 </a:solidFill>
-                <a:latin typeface="Malgun Gothic" pitchFamily="34" charset="0"/>
-                <a:ea typeface="Malgun Gothic" pitchFamily="34" charset="-122"/>
-                <a:cs typeface="Malgun Gothic" pitchFamily="34" charset="-120"/>
+                <a:latin typeface="Pretendard" pitchFamily="34" charset="0"/>
+                <a:ea typeface="Pretendard" pitchFamily="34" charset="-122"/>
+                <a:cs typeface="Pretendard" pitchFamily="34" charset="-120"/>
               </a:rPr>
               <a:t>사실, </a:t>
             </a:r>
@@ -4756,9 +4756,9 @@
                 <a:solidFill>
                   <a:srgbClr val="F0CE72"/>
                 </a:solidFill>
-                <a:latin typeface="Malgun Gothic" pitchFamily="34" charset="0"/>
-                <a:ea typeface="Malgun Gothic" pitchFamily="34" charset="-122"/>
-                <a:cs typeface="Malgun Gothic" pitchFamily="34" charset="-120"/>
+                <a:latin typeface="Pretendard" pitchFamily="34" charset="0"/>
+                <a:ea typeface="Pretendard" pitchFamily="34" charset="-122"/>
+                <a:cs typeface="Pretendard" pitchFamily="34" charset="-120"/>
               </a:rPr>
               <a:t>문제는 실력이 아닙니다.</a:t>
             </a:r>
@@ -4785,9 +4785,9 @@
                 <a:solidFill>
                   <a:srgbClr val="EDE7F6"/>
                 </a:solidFill>
-                <a:latin typeface="Malgun Gothic" pitchFamily="34" charset="0"/>
-                <a:ea typeface="Malgun Gothic" pitchFamily="34" charset="-122"/>
-                <a:cs typeface="Malgun Gothic" pitchFamily="34" charset="-120"/>
+                <a:latin typeface="Pretendard" pitchFamily="34" charset="0"/>
+                <a:ea typeface="Pretendard" pitchFamily="34" charset="-122"/>
+                <a:cs typeface="Pretendard" pitchFamily="34" charset="-120"/>
               </a:rPr>
               <a:t>당신은 이미 충분한 전문성을 가지고 있습니다.</a:t>
             </a:r>
@@ -4805,9 +4805,9 @@
                 <a:solidFill>
                   <a:srgbClr val="EDE7F6"/>
                 </a:solidFill>
-                <a:latin typeface="Malgun Gothic" pitchFamily="34" charset="0"/>
-                <a:ea typeface="Malgun Gothic" pitchFamily="34" charset="-122"/>
-                <a:cs typeface="Malgun Gothic" pitchFamily="34" charset="-120"/>
+                <a:latin typeface="Pretendard" pitchFamily="34" charset="0"/>
+                <a:ea typeface="Pretendard" pitchFamily="34" charset="-122"/>
+                <a:cs typeface="Pretendard" pitchFamily="34" charset="-120"/>
               </a:rPr>
               <a:t>명상을 지도하고, 사람의 변화를 돕고,</a:t>
             </a:r>
@@ -4825,9 +4825,9 @@
                 <a:solidFill>
                   <a:srgbClr val="EDE7F6"/>
                 </a:solidFill>
-                <a:latin typeface="Malgun Gothic" pitchFamily="34" charset="0"/>
-                <a:ea typeface="Malgun Gothic" pitchFamily="34" charset="-122"/>
-                <a:cs typeface="Malgun Gothic" pitchFamily="34" charset="-120"/>
+                <a:latin typeface="Pretendard" pitchFamily="34" charset="0"/>
+                <a:ea typeface="Pretendard" pitchFamily="34" charset="-122"/>
+                <a:cs typeface="Pretendard" pitchFamily="34" charset="-120"/>
               </a:rPr>
               <a:t>누군가의 삶을 조용히 바꾸고 있습니다.</a:t>
             </a:r>
@@ -4854,9 +4854,9 @@
                 <a:solidFill>
                   <a:srgbClr val="EDE7F6"/>
                 </a:solidFill>
-                <a:latin typeface="Malgun Gothic" pitchFamily="34" charset="0"/>
-                <a:ea typeface="Malgun Gothic" pitchFamily="34" charset="-122"/>
-                <a:cs typeface="Malgun Gothic" pitchFamily="34" charset="-120"/>
+                <a:latin typeface="Pretendard" pitchFamily="34" charset="0"/>
+                <a:ea typeface="Pretendard" pitchFamily="34" charset="-122"/>
+                <a:cs typeface="Pretendard" pitchFamily="34" charset="-120"/>
               </a:rPr>
               <a:t>그런데도 왜, 사람들은 당신을 모를까요?</a:t>
             </a:r>
@@ -4883,9 +4883,9 @@
                 <a:solidFill>
                   <a:srgbClr val="FFFFFF"/>
                 </a:solidFill>
-                <a:latin typeface="Malgun Gothic" pitchFamily="34" charset="0"/>
-                <a:ea typeface="Malgun Gothic" pitchFamily="34" charset="-122"/>
-                <a:cs typeface="Malgun Gothic" pitchFamily="34" charset="-120"/>
+                <a:latin typeface="Pretendard" pitchFamily="34" charset="0"/>
+                <a:ea typeface="Pretendard" pitchFamily="34" charset="-122"/>
+                <a:cs typeface="Pretendard" pitchFamily="34" charset="-120"/>
               </a:rPr>
               <a:t>이유는 단 하나.</a:t>
             </a:r>
@@ -4903,9 +4903,9 @@
                 <a:solidFill>
                   <a:srgbClr val="FFFFFF"/>
                 </a:solidFill>
-                <a:latin typeface="Malgun Gothic" pitchFamily="34" charset="0"/>
-                <a:ea typeface="Malgun Gothic" pitchFamily="34" charset="-122"/>
-                <a:cs typeface="Malgun Gothic" pitchFamily="34" charset="-120"/>
+                <a:latin typeface="Pretendard" pitchFamily="34" charset="0"/>
+                <a:ea typeface="Pretendard" pitchFamily="34" charset="-122"/>
+                <a:cs typeface="Pretendard" pitchFamily="34" charset="-120"/>
               </a:rPr>
               <a:t>아직 당신을 </a:t>
             </a:r>
@@ -4920,9 +4920,9 @@
                 <a:solidFill>
                   <a:srgbClr val="F0CE72"/>
                 </a:solidFill>
-                <a:latin typeface="Malgun Gothic" pitchFamily="34" charset="0"/>
-                <a:ea typeface="Malgun Gothic" pitchFamily="34" charset="-122"/>
-                <a:cs typeface="Malgun Gothic" pitchFamily="34" charset="-120"/>
+                <a:latin typeface="Pretendard" pitchFamily="34" charset="0"/>
+                <a:ea typeface="Pretendard" pitchFamily="34" charset="-122"/>
+                <a:cs typeface="Pretendard" pitchFamily="34" charset="-120"/>
               </a:rPr>
               <a:t>발견할 길</a:t>
             </a:r>
@@ -4937,9 +4937,9 @@
                 <a:solidFill>
                   <a:srgbClr val="FFFFFF"/>
                 </a:solidFill>
-                <a:latin typeface="Malgun Gothic" pitchFamily="34" charset="0"/>
-                <a:ea typeface="Malgun Gothic" pitchFamily="34" charset="-122"/>
-                <a:cs typeface="Malgun Gothic" pitchFamily="34" charset="-120"/>
+                <a:latin typeface="Pretendard" pitchFamily="34" charset="0"/>
+                <a:ea typeface="Pretendard" pitchFamily="34" charset="-122"/>
+                <a:cs typeface="Pretendard" pitchFamily="34" charset="-120"/>
               </a:rPr>
               <a:t>이</a:t>
             </a:r>
@@ -4957,9 +4957,9 @@
                 <a:solidFill>
                   <a:srgbClr val="FFFFFF"/>
                 </a:solidFill>
-                <a:latin typeface="Malgun Gothic" pitchFamily="34" charset="0"/>
-                <a:ea typeface="Malgun Gothic" pitchFamily="34" charset="-122"/>
-                <a:cs typeface="Malgun Gothic" pitchFamily="34" charset="-120"/>
+                <a:latin typeface="Pretendard" pitchFamily="34" charset="0"/>
+                <a:ea typeface="Pretendard" pitchFamily="34" charset="-122"/>
+                <a:cs typeface="Pretendard" pitchFamily="34" charset="-120"/>
               </a:rPr>
               <a:t>만들어지지 않았기 때문입니다.</a:t>
             </a:r>
@@ -5031,9 +5031,9 @@
                 <a:solidFill>
                   <a:srgbClr val="544A63"/>
                 </a:solidFill>
-                <a:latin typeface="Malgun Gothic" pitchFamily="34" charset="0"/>
-                <a:ea typeface="Malgun Gothic" pitchFamily="34" charset="-122"/>
-                <a:cs typeface="Malgun Gothic" pitchFamily="34" charset="-120"/>
+                <a:latin typeface="Pretendard" pitchFamily="34" charset="0"/>
+                <a:ea typeface="Pretendard" pitchFamily="34" charset="-122"/>
+                <a:cs typeface="Pretendard" pitchFamily="34" charset="-120"/>
               </a:rPr>
               <a:t>많은 분들이 브랜드를 오해합니다.</a:t>
             </a:r>
@@ -5060,9 +5060,9 @@
                 <a:solidFill>
                   <a:srgbClr val="544A63"/>
                 </a:solidFill>
-                <a:latin typeface="Malgun Gothic" pitchFamily="34" charset="0"/>
-                <a:ea typeface="Malgun Gothic" pitchFamily="34" charset="-122"/>
-                <a:cs typeface="Malgun Gothic" pitchFamily="34" charset="-120"/>
+                <a:latin typeface="Pretendard" pitchFamily="34" charset="0"/>
+                <a:ea typeface="Pretendard" pitchFamily="34" charset="-122"/>
+                <a:cs typeface="Pretendard" pitchFamily="34" charset="-120"/>
               </a:rPr>
               <a:t>예쁜 로고가 아닙니다.</a:t>
             </a:r>
@@ -5080,9 +5080,9 @@
                 <a:solidFill>
                   <a:srgbClr val="544A63"/>
                 </a:solidFill>
-                <a:latin typeface="Malgun Gothic" pitchFamily="34" charset="0"/>
-                <a:ea typeface="Malgun Gothic" pitchFamily="34" charset="-122"/>
-                <a:cs typeface="Malgun Gothic" pitchFamily="34" charset="-120"/>
+                <a:latin typeface="Pretendard" pitchFamily="34" charset="0"/>
+                <a:ea typeface="Pretendard" pitchFamily="34" charset="-122"/>
+                <a:cs typeface="Pretendard" pitchFamily="34" charset="-120"/>
               </a:rPr>
               <a:t>멋진 홈페이지도, 팔로워 숫자도 아닙니다.</a:t>
             </a:r>
@@ -5109,9 +5109,9 @@
                 <a:solidFill>
                   <a:srgbClr val="4E2E82"/>
                 </a:solidFill>
-                <a:latin typeface="Malgun Gothic" pitchFamily="34" charset="0"/>
-                <a:ea typeface="Malgun Gothic" pitchFamily="34" charset="-122"/>
-                <a:cs typeface="Malgun Gothic" pitchFamily="34" charset="-120"/>
+                <a:latin typeface="Pretendard" pitchFamily="34" charset="0"/>
+                <a:ea typeface="Pretendard" pitchFamily="34" charset="-122"/>
+                <a:cs typeface="Pretendard" pitchFamily="34" charset="-120"/>
               </a:rPr>
               <a:t>브랜드란,</a:t>
             </a:r>
@@ -5129,9 +5129,9 @@
                 <a:solidFill>
                   <a:srgbClr val="4E2E82"/>
                 </a:solidFill>
-                <a:latin typeface="Malgun Gothic" pitchFamily="34" charset="0"/>
-                <a:ea typeface="Malgun Gothic" pitchFamily="34" charset="-122"/>
-                <a:cs typeface="Malgun Gothic" pitchFamily="34" charset="-120"/>
+                <a:latin typeface="Pretendard" pitchFamily="34" charset="0"/>
+                <a:ea typeface="Pretendard" pitchFamily="34" charset="-122"/>
+                <a:cs typeface="Pretendard" pitchFamily="34" charset="-120"/>
               </a:rPr>
               <a:t>사람들이 </a:t>
             </a:r>
@@ -5146,9 +5146,9 @@
                 <a:solidFill>
                   <a:srgbClr val="B8862B"/>
                 </a:solidFill>
-                <a:latin typeface="Malgun Gothic" pitchFamily="34" charset="0"/>
-                <a:ea typeface="Malgun Gothic" pitchFamily="34" charset="-122"/>
-                <a:cs typeface="Malgun Gothic" pitchFamily="34" charset="-120"/>
+                <a:latin typeface="Pretendard" pitchFamily="34" charset="0"/>
+                <a:ea typeface="Pretendard" pitchFamily="34" charset="-122"/>
+                <a:cs typeface="Pretendard" pitchFamily="34" charset="-120"/>
               </a:rPr>
               <a:t>당신을 신뢰하는 이유</a:t>
             </a:r>
@@ -5163,9 +5163,9 @@
                 <a:solidFill>
                   <a:srgbClr val="4E2E82"/>
                 </a:solidFill>
-                <a:latin typeface="Malgun Gothic" pitchFamily="34" charset="0"/>
-                <a:ea typeface="Malgun Gothic" pitchFamily="34" charset="-122"/>
-                <a:cs typeface="Malgun Gothic" pitchFamily="34" charset="-120"/>
+                <a:latin typeface="Pretendard" pitchFamily="34" charset="0"/>
+                <a:ea typeface="Pretendard" pitchFamily="34" charset="-122"/>
+                <a:cs typeface="Pretendard" pitchFamily="34" charset="-120"/>
               </a:rPr>
               <a:t>입니다.</a:t>
             </a:r>
@@ -5192,9 +5192,9 @@
                 <a:solidFill>
                   <a:srgbClr val="544A63"/>
                 </a:solidFill>
-                <a:latin typeface="Malgun Gothic" pitchFamily="34" charset="0"/>
-                <a:ea typeface="Malgun Gothic" pitchFamily="34" charset="-122"/>
-                <a:cs typeface="Malgun Gothic" pitchFamily="34" charset="-120"/>
+                <a:latin typeface="Pretendard" pitchFamily="34" charset="0"/>
+                <a:ea typeface="Pretendard" pitchFamily="34" charset="-122"/>
+                <a:cs typeface="Pretendard" pitchFamily="34" charset="-120"/>
               </a:rPr>
               <a:t>사람들은 가장 잘 가르치는 사람이 아니라,</a:t>
             </a:r>
@@ -5212,9 +5212,9 @@
                 <a:solidFill>
                   <a:srgbClr val="2A2138"/>
                 </a:solidFill>
-                <a:latin typeface="Malgun Gothic" pitchFamily="34" charset="0"/>
-                <a:ea typeface="Malgun Gothic" pitchFamily="34" charset="-122"/>
-                <a:cs typeface="Malgun Gothic" pitchFamily="34" charset="-120"/>
+                <a:latin typeface="Pretendard" pitchFamily="34" charset="0"/>
+                <a:ea typeface="Pretendard" pitchFamily="34" charset="-122"/>
+                <a:cs typeface="Pretendard" pitchFamily="34" charset="-120"/>
               </a:rPr>
               <a:t>가장 먼저 떠오르는 사람</a:t>
             </a:r>
@@ -5229,9 +5229,9 @@
                 <a:solidFill>
                   <a:srgbClr val="544A63"/>
                 </a:solidFill>
-                <a:latin typeface="Malgun Gothic" pitchFamily="34" charset="0"/>
-                <a:ea typeface="Malgun Gothic" pitchFamily="34" charset="-122"/>
-                <a:cs typeface="Malgun Gothic" pitchFamily="34" charset="-120"/>
+                <a:latin typeface="Pretendard" pitchFamily="34" charset="0"/>
+                <a:ea typeface="Pretendard" pitchFamily="34" charset="-122"/>
+                <a:cs typeface="Pretendard" pitchFamily="34" charset="-120"/>
               </a:rPr>
               <a:t>을 선택합니다.</a:t>
             </a:r>
@@ -5249,9 +5249,9 @@
                 <a:solidFill>
                   <a:srgbClr val="544A63"/>
                 </a:solidFill>
-                <a:latin typeface="Malgun Gothic" pitchFamily="34" charset="0"/>
-                <a:ea typeface="Malgun Gothic" pitchFamily="34" charset="-122"/>
-                <a:cs typeface="Malgun Gothic" pitchFamily="34" charset="-120"/>
+                <a:latin typeface="Pretendard" pitchFamily="34" charset="0"/>
+                <a:ea typeface="Pretendard" pitchFamily="34" charset="-122"/>
+                <a:cs typeface="Pretendard" pitchFamily="34" charset="-120"/>
               </a:rPr>
               <a:t>그리고 그 신뢰는, 콘텐츠를 통해 조금씩 쌓입니다.</a:t>
             </a:r>
@@ -5320,9 +5320,9 @@
                 <a:solidFill>
                   <a:srgbClr val="F0CE72"/>
                 </a:solidFill>
-                <a:latin typeface="Malgun Gothic" pitchFamily="34" charset="0"/>
-                <a:ea typeface="Malgun Gothic" pitchFamily="34" charset="-122"/>
-                <a:cs typeface="Malgun Gothic" pitchFamily="34" charset="-120"/>
+                <a:latin typeface="Pretendard" pitchFamily="34" charset="0"/>
+                <a:ea typeface="Pretendard" pitchFamily="34" charset="-122"/>
+                <a:cs typeface="Pretendard" pitchFamily="34" charset="-120"/>
               </a:rPr>
               <a:t>AI가 바꾼 것, 바꾸지 못한 것</a:t>
             </a:r>
@@ -5362,9 +5362,9 @@
                 <a:solidFill>
                   <a:srgbClr val="EDE7F6"/>
                 </a:solidFill>
-                <a:latin typeface="Malgun Gothic" pitchFamily="34" charset="0"/>
-                <a:ea typeface="Malgun Gothic" pitchFamily="34" charset="-122"/>
-                <a:cs typeface="Malgun Gothic" pitchFamily="34" charset="-120"/>
+                <a:latin typeface="Pretendard" pitchFamily="34" charset="0"/>
+                <a:ea typeface="Pretendard" pitchFamily="34" charset="-122"/>
+                <a:cs typeface="Pretendard" pitchFamily="34" charset="-120"/>
               </a:rPr>
               <a:t>AI가 웰니스 전문가를 대체할까요?  </a:t>
             </a:r>
@@ -5379,9 +5379,9 @@
                 <a:solidFill>
                   <a:srgbClr val="F0CE72"/>
                 </a:solidFill>
-                <a:latin typeface="Malgun Gothic" pitchFamily="34" charset="0"/>
-                <a:ea typeface="Malgun Gothic" pitchFamily="34" charset="-122"/>
-                <a:cs typeface="Malgun Gothic" pitchFamily="34" charset="-120"/>
+                <a:latin typeface="Pretendard" pitchFamily="34" charset="0"/>
+                <a:ea typeface="Pretendard" pitchFamily="34" charset="-122"/>
+                <a:cs typeface="Pretendard" pitchFamily="34" charset="-120"/>
               </a:rPr>
               <a:t>아닙니다.</a:t>
             </a:r>
@@ -5408,9 +5408,9 @@
                 <a:solidFill>
                   <a:srgbClr val="EDE7F6"/>
                 </a:solidFill>
-                <a:latin typeface="Malgun Gothic" pitchFamily="34" charset="0"/>
-                <a:ea typeface="Malgun Gothic" pitchFamily="34" charset="-122"/>
-                <a:cs typeface="Malgun Gothic" pitchFamily="34" charset="-120"/>
+                <a:latin typeface="Pretendard" pitchFamily="34" charset="0"/>
+                <a:ea typeface="Pretendard" pitchFamily="34" charset="-122"/>
+                <a:cs typeface="Pretendard" pitchFamily="34" charset="-120"/>
               </a:rPr>
               <a:t>AI는 사람의 마음을 공감하지 못합니다.</a:t>
             </a:r>
@@ -5428,9 +5428,9 @@
                 <a:solidFill>
                   <a:srgbClr val="EDE7F6"/>
                 </a:solidFill>
-                <a:latin typeface="Malgun Gothic" pitchFamily="34" charset="0"/>
-                <a:ea typeface="Malgun Gothic" pitchFamily="34" charset="-122"/>
-                <a:cs typeface="Malgun Gothic" pitchFamily="34" charset="-120"/>
+                <a:latin typeface="Pretendard" pitchFamily="34" charset="0"/>
+                <a:ea typeface="Pretendard" pitchFamily="34" charset="-122"/>
+                <a:cs typeface="Pretendard" pitchFamily="34" charset="-120"/>
               </a:rPr>
               <a:t>진심 어린 상담도, 깊은 명상도,</a:t>
             </a:r>
@@ -5448,9 +5448,9 @@
                 <a:solidFill>
                   <a:srgbClr val="EDE7F6"/>
                 </a:solidFill>
-                <a:latin typeface="Malgun Gothic" pitchFamily="34" charset="0"/>
-                <a:ea typeface="Malgun Gothic" pitchFamily="34" charset="-122"/>
-                <a:cs typeface="Malgun Gothic" pitchFamily="34" charset="-120"/>
+                <a:latin typeface="Pretendard" pitchFamily="34" charset="0"/>
+                <a:ea typeface="Pretendard" pitchFamily="34" charset="-122"/>
+                <a:cs typeface="Pretendard" pitchFamily="34" charset="-120"/>
               </a:rPr>
               <a:t>삶을 바꾸는 코칭도 대신할 수 없습니다.</a:t>
             </a:r>
@@ -5477,9 +5477,9 @@
                 <a:solidFill>
                   <a:srgbClr val="FFFFFF"/>
                 </a:solidFill>
-                <a:latin typeface="Malgun Gothic" pitchFamily="34" charset="0"/>
-                <a:ea typeface="Malgun Gothic" pitchFamily="34" charset="-122"/>
-                <a:cs typeface="Malgun Gothic" pitchFamily="34" charset="-120"/>
+                <a:latin typeface="Pretendard" pitchFamily="34" charset="0"/>
+                <a:ea typeface="Pretendard" pitchFamily="34" charset="-122"/>
+                <a:cs typeface="Pretendard" pitchFamily="34" charset="-120"/>
               </a:rPr>
               <a:t>다만, AI를 </a:t>
             </a:r>
@@ -5494,9 +5494,9 @@
                 <a:solidFill>
                   <a:srgbClr val="F0CE72"/>
                 </a:solidFill>
-                <a:latin typeface="Malgun Gothic" pitchFamily="34" charset="0"/>
-                <a:ea typeface="Malgun Gothic" pitchFamily="34" charset="-122"/>
-                <a:cs typeface="Malgun Gothic" pitchFamily="34" charset="-120"/>
+                <a:latin typeface="Pretendard" pitchFamily="34" charset="0"/>
+                <a:ea typeface="Pretendard" pitchFamily="34" charset="-122"/>
+                <a:cs typeface="Pretendard" pitchFamily="34" charset="-120"/>
               </a:rPr>
               <a:t>활용하는</a:t>
             </a:r>
@@ -5511,9 +5511,9 @@
                 <a:solidFill>
                   <a:srgbClr val="FFFFFF"/>
                 </a:solidFill>
-                <a:latin typeface="Malgun Gothic" pitchFamily="34" charset="0"/>
-                <a:ea typeface="Malgun Gothic" pitchFamily="34" charset="-122"/>
-                <a:cs typeface="Malgun Gothic" pitchFamily="34" charset="-120"/>
+                <a:latin typeface="Pretendard" pitchFamily="34" charset="0"/>
+                <a:ea typeface="Pretendard" pitchFamily="34" charset="-122"/>
+                <a:cs typeface="Pretendard" pitchFamily="34" charset="-120"/>
               </a:rPr>
               <a:t> 전문가는</a:t>
             </a:r>
@@ -5531,9 +5531,9 @@
                 <a:solidFill>
                   <a:srgbClr val="FFFFFF"/>
                 </a:solidFill>
-                <a:latin typeface="Malgun Gothic" pitchFamily="34" charset="0"/>
-                <a:ea typeface="Malgun Gothic" pitchFamily="34" charset="-122"/>
-                <a:cs typeface="Malgun Gothic" pitchFamily="34" charset="-120"/>
+                <a:latin typeface="Pretendard" pitchFamily="34" charset="0"/>
+                <a:ea typeface="Pretendard" pitchFamily="34" charset="-122"/>
+                <a:cs typeface="Pretendard" pitchFamily="34" charset="-120"/>
               </a:rPr>
               <a:t>그렇지 않은 전문가보다 훨씬 빠르게 알려집니다.</a:t>
             </a:r>
@@ -5560,9 +5560,9 @@
                 <a:solidFill>
                   <a:srgbClr val="EDE7F6"/>
                 </a:solidFill>
-                <a:latin typeface="Malgun Gothic" pitchFamily="34" charset="0"/>
-                <a:ea typeface="Malgun Gothic" pitchFamily="34" charset="-122"/>
-                <a:cs typeface="Malgun Gothic" pitchFamily="34" charset="-120"/>
+                <a:latin typeface="Pretendard" pitchFamily="34" charset="0"/>
+                <a:ea typeface="Pretendard" pitchFamily="34" charset="-122"/>
+                <a:cs typeface="Pretendard" pitchFamily="34" charset="-120"/>
               </a:rPr>
               <a:t>예전엔 광고비도, 직원도, 마케팅팀도 필요했습니다.</a:t>
             </a:r>
@@ -5580,9 +5580,9 @@
                 <a:solidFill>
                   <a:srgbClr val="EDE7F6"/>
                 </a:solidFill>
-                <a:latin typeface="Malgun Gothic" pitchFamily="34" charset="0"/>
-                <a:ea typeface="Malgun Gothic" pitchFamily="34" charset="-122"/>
-                <a:cs typeface="Malgun Gothic" pitchFamily="34" charset="-120"/>
+                <a:latin typeface="Pretendard" pitchFamily="34" charset="0"/>
+                <a:ea typeface="Pretendard" pitchFamily="34" charset="-122"/>
+                <a:cs typeface="Pretendard" pitchFamily="34" charset="-120"/>
               </a:rPr>
               <a:t>지금은 AI와 올바른 순서만 있으면, 혼자서도 충분히 해낼 수 있습니다.</a:t>
             </a:r>
@@ -5651,9 +5651,9 @@
                 <a:solidFill>
                   <a:srgbClr val="B8862B"/>
                 </a:solidFill>
-                <a:latin typeface="Malgun Gothic" pitchFamily="34" charset="0"/>
-                <a:ea typeface="Malgun Gothic" pitchFamily="34" charset="-122"/>
-                <a:cs typeface="Malgun Gothic" pitchFamily="34" charset="-120"/>
+                <a:latin typeface="Pretendard" pitchFamily="34" charset="0"/>
+                <a:ea typeface="Pretendard" pitchFamily="34" charset="-122"/>
+                <a:cs typeface="Pretendard" pitchFamily="34" charset="-120"/>
               </a:rPr>
               <a:t>이 특강에서 아낌없이 드립니다</a:t>
             </a:r>
@@ -5693,9 +5693,9 @@
                 <a:solidFill>
                   <a:srgbClr val="2A2138"/>
                 </a:solidFill>
-                <a:latin typeface="Malgun Gothic" pitchFamily="34" charset="0"/>
-                <a:ea typeface="Malgun Gothic" pitchFamily="34" charset="-122"/>
-                <a:cs typeface="Malgun Gothic" pitchFamily="34" charset="-120"/>
+                <a:latin typeface="Pretendard" pitchFamily="34" charset="0"/>
+                <a:ea typeface="Pretendard" pitchFamily="34" charset="-122"/>
+                <a:cs typeface="Pretendard" pitchFamily="34" charset="-120"/>
               </a:rPr>
               <a:t>웰니스 전문가가 꼭 알아야 할 핵심,</a:t>
             </a:r>
@@ -5713,9 +5713,9 @@
                 <a:solidFill>
                   <a:srgbClr val="2A2138"/>
                 </a:solidFill>
-                <a:latin typeface="Malgun Gothic" pitchFamily="34" charset="0"/>
-                <a:ea typeface="Malgun Gothic" pitchFamily="34" charset="-122"/>
-                <a:cs typeface="Malgun Gothic" pitchFamily="34" charset="-120"/>
+                <a:latin typeface="Pretendard" pitchFamily="34" charset="0"/>
+                <a:ea typeface="Pretendard" pitchFamily="34" charset="-122"/>
+                <a:cs typeface="Pretendard" pitchFamily="34" charset="-120"/>
               </a:rPr>
               <a:t>무료로 다 풀어드립니다</a:t>
             </a:r>
@@ -5786,9 +5786,9 @@
                 <a:solidFill>
                   <a:srgbClr val="B8862B"/>
                 </a:solidFill>
-                <a:latin typeface="Malgun Gothic" pitchFamily="34" charset="0"/>
-                <a:ea typeface="Malgun Gothic" pitchFamily="34" charset="-122"/>
-                <a:cs typeface="Malgun Gothic" pitchFamily="34" charset="-120"/>
+                <a:latin typeface="Pretendard" pitchFamily="34" charset="0"/>
+                <a:ea typeface="Pretendard" pitchFamily="34" charset="-122"/>
+                <a:cs typeface="Pretendard" pitchFamily="34" charset="-120"/>
               </a:rPr>
               <a:t>01 · 발견</a:t>
             </a:r>
@@ -5825,9 +5825,9 @@
                 <a:solidFill>
                   <a:srgbClr val="4E2E82"/>
                 </a:solidFill>
-                <a:latin typeface="Malgun Gothic" pitchFamily="34" charset="0"/>
-                <a:ea typeface="Malgun Gothic" pitchFamily="34" charset="-122"/>
-                <a:cs typeface="Malgun Gothic" pitchFamily="34" charset="-120"/>
+                <a:latin typeface="Pretendard" pitchFamily="34" charset="0"/>
+                <a:ea typeface="Pretendard" pitchFamily="34" charset="-122"/>
+                <a:cs typeface="Pretendard" pitchFamily="34" charset="-120"/>
               </a:rPr>
               <a:t>검색되는 전문가가 되는 법</a:t>
             </a:r>
@@ -5867,9 +5867,9 @@
                 <a:solidFill>
                   <a:srgbClr val="544A63"/>
                 </a:solidFill>
-                <a:latin typeface="Malgun Gothic" pitchFamily="34" charset="0"/>
-                <a:ea typeface="Malgun Gothic" pitchFamily="34" charset="-122"/>
-                <a:cs typeface="Malgun Gothic" pitchFamily="34" charset="-120"/>
+                <a:latin typeface="Pretendard" pitchFamily="34" charset="0"/>
+                <a:ea typeface="Pretendard" pitchFamily="34" charset="-122"/>
+                <a:cs typeface="Pretendard" pitchFamily="34" charset="-120"/>
               </a:rPr>
               <a:t>실력 있는 강사가 왜 온라인에선 존재감이 없는지, 어떻게 내 이름이 검색에 잡히는지 그 구조를 알려드립니다.</a:t>
             </a:r>
@@ -5940,9 +5940,9 @@
                 <a:solidFill>
                   <a:srgbClr val="B8862B"/>
                 </a:solidFill>
-                <a:latin typeface="Malgun Gothic" pitchFamily="34" charset="0"/>
-                <a:ea typeface="Malgun Gothic" pitchFamily="34" charset="-122"/>
-                <a:cs typeface="Malgun Gothic" pitchFamily="34" charset="-120"/>
+                <a:latin typeface="Pretendard" pitchFamily="34" charset="0"/>
+                <a:ea typeface="Pretendard" pitchFamily="34" charset="-122"/>
+                <a:cs typeface="Pretendard" pitchFamily="34" charset="-120"/>
               </a:rPr>
               <a:t>02 · 정체성</a:t>
             </a:r>
@@ -5979,9 +5979,9 @@
                 <a:solidFill>
                   <a:srgbClr val="4E2E82"/>
                 </a:solidFill>
-                <a:latin typeface="Malgun Gothic" pitchFamily="34" charset="0"/>
-                <a:ea typeface="Malgun Gothic" pitchFamily="34" charset="-122"/>
-                <a:cs typeface="Malgun Gothic" pitchFamily="34" charset="-120"/>
+                <a:latin typeface="Pretendard" pitchFamily="34" charset="0"/>
+                <a:ea typeface="Pretendard" pitchFamily="34" charset="-122"/>
+                <a:cs typeface="Pretendard" pitchFamily="34" charset="-120"/>
               </a:rPr>
               <a:t>나만의 브랜드 정체성 설계</a:t>
             </a:r>
@@ -6021,9 +6021,9 @@
                 <a:solidFill>
                   <a:srgbClr val="544A63"/>
                 </a:solidFill>
-                <a:latin typeface="Malgun Gothic" pitchFamily="34" charset="0"/>
-                <a:ea typeface="Malgun Gothic" pitchFamily="34" charset="-122"/>
-                <a:cs typeface="Malgun Gothic" pitchFamily="34" charset="-120"/>
+                <a:latin typeface="Pretendard" pitchFamily="34" charset="0"/>
+                <a:ea typeface="Pretendard" pitchFamily="34" charset="-122"/>
+                <a:cs typeface="Pretendard" pitchFamily="34" charset="-120"/>
               </a:rPr>
               <a:t>남을 따라 하지 않아도 되는, 나의 철학과 강점에서 출발하는 브랜드 메시지를 잡는 법.</a:t>
             </a:r>
@@ -6094,9 +6094,9 @@
                 <a:solidFill>
                   <a:srgbClr val="B8862B"/>
                 </a:solidFill>
-                <a:latin typeface="Malgun Gothic" pitchFamily="34" charset="0"/>
-                <a:ea typeface="Malgun Gothic" pitchFamily="34" charset="-122"/>
-                <a:cs typeface="Malgun Gothic" pitchFamily="34" charset="-120"/>
+                <a:latin typeface="Pretendard" pitchFamily="34" charset="0"/>
+                <a:ea typeface="Pretendard" pitchFamily="34" charset="-122"/>
+                <a:cs typeface="Pretendard" pitchFamily="34" charset="-120"/>
               </a:rPr>
               <a:t>03 · AI 활용</a:t>
             </a:r>
@@ -6133,9 +6133,9 @@
                 <a:solidFill>
                   <a:srgbClr val="4E2E82"/>
                 </a:solidFill>
-                <a:latin typeface="Malgun Gothic" pitchFamily="34" charset="0"/>
-                <a:ea typeface="Malgun Gothic" pitchFamily="34" charset="-122"/>
-                <a:cs typeface="Malgun Gothic" pitchFamily="34" charset="-120"/>
+                <a:latin typeface="Pretendard" pitchFamily="34" charset="0"/>
+                <a:ea typeface="Pretendard" pitchFamily="34" charset="-122"/>
+                <a:cs typeface="Pretendard" pitchFamily="34" charset="-120"/>
               </a:rPr>
               <a:t>AI를 나만의 콘텐츠 비서로</a:t>
             </a:r>
@@ -6175,9 +6175,9 @@
                 <a:solidFill>
                   <a:srgbClr val="544A63"/>
                 </a:solidFill>
-                <a:latin typeface="Malgun Gothic" pitchFamily="34" charset="0"/>
-                <a:ea typeface="Malgun Gothic" pitchFamily="34" charset="-122"/>
-                <a:cs typeface="Malgun Gothic" pitchFamily="34" charset="-120"/>
+                <a:latin typeface="Pretendard" pitchFamily="34" charset="0"/>
+                <a:ea typeface="Pretendard" pitchFamily="34" charset="-122"/>
+                <a:cs typeface="Pretendard" pitchFamily="34" charset="-120"/>
               </a:rPr>
               <a:t>글감을 찾고, 블로그 글 하나를 인스타·스레드까지 확장하는 실전 프롬프트와 자동화의 기본기.</a:t>
             </a:r>
@@ -6248,9 +6248,9 @@
                 <a:solidFill>
                   <a:srgbClr val="B8862B"/>
                 </a:solidFill>
-                <a:latin typeface="Malgun Gothic" pitchFamily="34" charset="0"/>
-                <a:ea typeface="Malgun Gothic" pitchFamily="34" charset="-122"/>
-                <a:cs typeface="Malgun Gothic" pitchFamily="34" charset="-120"/>
+                <a:latin typeface="Pretendard" pitchFamily="34" charset="0"/>
+                <a:ea typeface="Pretendard" pitchFamily="34" charset="-122"/>
+                <a:cs typeface="Pretendard" pitchFamily="34" charset="-120"/>
               </a:rPr>
               <a:t>04 · 연결</a:t>
             </a:r>
@@ -6287,9 +6287,9 @@
                 <a:solidFill>
                   <a:srgbClr val="4E2E82"/>
                 </a:solidFill>
-                <a:latin typeface="Malgun Gothic" pitchFamily="34" charset="0"/>
-                <a:ea typeface="Malgun Gothic" pitchFamily="34" charset="-122"/>
-                <a:cs typeface="Malgun Gothic" pitchFamily="34" charset="-120"/>
+                <a:latin typeface="Pretendard" pitchFamily="34" charset="0"/>
+                <a:ea typeface="Pretendard" pitchFamily="34" charset="-122"/>
+                <a:cs typeface="Pretendard" pitchFamily="34" charset="-120"/>
               </a:rPr>
               <a:t>신뢰가 고객으로 이어지는 흐름</a:t>
             </a:r>
@@ -6329,9 +6329,9 @@
                 <a:solidFill>
                   <a:srgbClr val="544A63"/>
                 </a:solidFill>
-                <a:latin typeface="Malgun Gothic" pitchFamily="34" charset="0"/>
-                <a:ea typeface="Malgun Gothic" pitchFamily="34" charset="-122"/>
-                <a:cs typeface="Malgun Gothic" pitchFamily="34" charset="-120"/>
+                <a:latin typeface="Pretendard" pitchFamily="34" charset="0"/>
+                <a:ea typeface="Pretendard" pitchFamily="34" charset="-122"/>
+                <a:cs typeface="Pretendard" pitchFamily="34" charset="-120"/>
               </a:rPr>
               <a:t>쌓인 콘텐츠가 상담·클래스 신청으로 자연스럽게 이어지는 그 동선을 설계하는 법.</a:t>
             </a:r>
@@ -6368,9 +6368,9 @@
                 <a:solidFill>
                   <a:srgbClr val="2A2138"/>
                 </a:solidFill>
-                <a:latin typeface="Malgun Gothic" pitchFamily="34" charset="0"/>
-                <a:ea typeface="Malgun Gothic" pitchFamily="34" charset="-122"/>
-                <a:cs typeface="Malgun Gothic" pitchFamily="34" charset="-120"/>
+                <a:latin typeface="Pretendard" pitchFamily="34" charset="0"/>
+                <a:ea typeface="Pretendard" pitchFamily="34" charset="-122"/>
+                <a:cs typeface="Pretendard" pitchFamily="34" charset="-120"/>
               </a:rPr>
               <a:t>감추고 아끼는 특강이 아닙니다. </a:t>
             </a:r>
@@ -6382,9 +6382,9 @@
                 <a:solidFill>
                   <a:srgbClr val="4E2E82"/>
                 </a:solidFill>
-                <a:latin typeface="Malgun Gothic" pitchFamily="34" charset="0"/>
-                <a:ea typeface="Malgun Gothic" pitchFamily="34" charset="-122"/>
-                <a:cs typeface="Malgun Gothic" pitchFamily="34" charset="-120"/>
+                <a:latin typeface="Pretendard" pitchFamily="34" charset="0"/>
+                <a:ea typeface="Pretendard" pitchFamily="34" charset="-122"/>
+                <a:cs typeface="Pretendard" pitchFamily="34" charset="-120"/>
               </a:rPr>
               <a:t>정말 필요한 것을, 이 자리에서 다 드립니다.</a:t>
             </a:r>
@@ -6453,9 +6453,9 @@
                 <a:solidFill>
                   <a:srgbClr val="F0CE72"/>
                 </a:solidFill>
-                <a:latin typeface="Malgun Gothic" pitchFamily="34" charset="0"/>
-                <a:ea typeface="Malgun Gothic" pitchFamily="34" charset="-122"/>
-                <a:cs typeface="Malgun Gothic" pitchFamily="34" charset="-120"/>
+                <a:latin typeface="Pretendard" pitchFamily="34" charset="0"/>
+                <a:ea typeface="Pretendard" pitchFamily="34" charset="-122"/>
+                <a:cs typeface="Pretendard" pitchFamily="34" charset="-120"/>
               </a:rPr>
               <a:t>한눈에 보는 전체 그림</a:t>
             </a:r>
@@ -6495,9 +6495,9 @@
                 <a:solidFill>
                   <a:srgbClr val="FFFFFF"/>
                 </a:solidFill>
-                <a:latin typeface="Malgun Gothic" pitchFamily="34" charset="0"/>
-                <a:ea typeface="Malgun Gothic" pitchFamily="34" charset="-122"/>
-                <a:cs typeface="Malgun Gothic" pitchFamily="34" charset="-120"/>
+                <a:latin typeface="Pretendard" pitchFamily="34" charset="0"/>
+                <a:ea typeface="Pretendard" pitchFamily="34" charset="-122"/>
+                <a:cs typeface="Pretendard" pitchFamily="34" charset="-120"/>
               </a:rPr>
               <a:t>실력이 알려지고,</a:t>
             </a:r>
@@ -6515,9 +6515,9 @@
                 <a:solidFill>
                   <a:srgbClr val="FFFFFF"/>
                 </a:solidFill>
-                <a:latin typeface="Malgun Gothic" pitchFamily="34" charset="0"/>
-                <a:ea typeface="Malgun Gothic" pitchFamily="34" charset="-122"/>
-                <a:cs typeface="Malgun Gothic" pitchFamily="34" charset="-120"/>
+                <a:latin typeface="Pretendard" pitchFamily="34" charset="0"/>
+                <a:ea typeface="Pretendard" pitchFamily="34" charset="-122"/>
+                <a:cs typeface="Pretendard" pitchFamily="34" charset="-120"/>
               </a:rPr>
               <a:t>사람이 모이는 흐름</a:t>
             </a:r>
@@ -6581,9 +6581,9 @@
                 <a:solidFill>
                   <a:srgbClr val="EDE7F6"/>
                 </a:solidFill>
-                <a:latin typeface="Malgun Gothic" pitchFamily="34" charset="0"/>
-                <a:ea typeface="Malgun Gothic" pitchFamily="34" charset="-122"/>
-                <a:cs typeface="Malgun Gothic" pitchFamily="34" charset="-120"/>
+                <a:latin typeface="Pretendard" pitchFamily="34" charset="0"/>
+                <a:ea typeface="Pretendard" pitchFamily="34" charset="-122"/>
+                <a:cs typeface="Pretendard" pitchFamily="34" charset="-120"/>
               </a:rPr>
               <a:t>전문성</a:t>
             </a:r>
@@ -6620,9 +6620,9 @@
                 <a:solidFill>
                   <a:srgbClr val="F0CE72"/>
                 </a:solidFill>
-                <a:latin typeface="Malgun Gothic" pitchFamily="34" charset="0"/>
-                <a:ea typeface="Malgun Gothic" pitchFamily="34" charset="-122"/>
-                <a:cs typeface="Malgun Gothic" pitchFamily="34" charset="-120"/>
+                <a:latin typeface="Pretendard" pitchFamily="34" charset="0"/>
+                <a:ea typeface="Pretendard" pitchFamily="34" charset="-122"/>
+                <a:cs typeface="Pretendard" pitchFamily="34" charset="-120"/>
               </a:rPr>
               <a:t>↓</a:t>
             </a:r>
@@ -6686,9 +6686,9 @@
                 <a:solidFill>
                   <a:srgbClr val="EDE7F6"/>
                 </a:solidFill>
-                <a:latin typeface="Malgun Gothic" pitchFamily="34" charset="0"/>
-                <a:ea typeface="Malgun Gothic" pitchFamily="34" charset="-122"/>
-                <a:cs typeface="Malgun Gothic" pitchFamily="34" charset="-120"/>
+                <a:latin typeface="Pretendard" pitchFamily="34" charset="0"/>
+                <a:ea typeface="Pretendard" pitchFamily="34" charset="-122"/>
+                <a:cs typeface="Pretendard" pitchFamily="34" charset="-120"/>
               </a:rPr>
               <a:t>브랜딩 — 나를 한 문장으로</a:t>
             </a:r>
@@ -6725,9 +6725,9 @@
                 <a:solidFill>
                   <a:srgbClr val="F0CE72"/>
                 </a:solidFill>
-                <a:latin typeface="Malgun Gothic" pitchFamily="34" charset="0"/>
-                <a:ea typeface="Malgun Gothic" pitchFamily="34" charset="-122"/>
-                <a:cs typeface="Malgun Gothic" pitchFamily="34" charset="-120"/>
+                <a:latin typeface="Pretendard" pitchFamily="34" charset="0"/>
+                <a:ea typeface="Pretendard" pitchFamily="34" charset="-122"/>
+                <a:cs typeface="Pretendard" pitchFamily="34" charset="-120"/>
               </a:rPr>
               <a:t>↓</a:t>
             </a:r>
@@ -6791,9 +6791,9 @@
                 <a:solidFill>
                   <a:srgbClr val="EDE7F6"/>
                 </a:solidFill>
-                <a:latin typeface="Malgun Gothic" pitchFamily="34" charset="0"/>
-                <a:ea typeface="Malgun Gothic" pitchFamily="34" charset="-122"/>
-                <a:cs typeface="Malgun Gothic" pitchFamily="34" charset="-120"/>
+                <a:latin typeface="Pretendard" pitchFamily="34" charset="0"/>
+                <a:ea typeface="Pretendard" pitchFamily="34" charset="-122"/>
+                <a:cs typeface="Pretendard" pitchFamily="34" charset="-120"/>
               </a:rPr>
               <a:t>콘텐츠 — AI로 꾸준하게</a:t>
             </a:r>
@@ -6830,9 +6830,9 @@
                 <a:solidFill>
                   <a:srgbClr val="F0CE72"/>
                 </a:solidFill>
-                <a:latin typeface="Malgun Gothic" pitchFamily="34" charset="0"/>
-                <a:ea typeface="Malgun Gothic" pitchFamily="34" charset="-122"/>
-                <a:cs typeface="Malgun Gothic" pitchFamily="34" charset="-120"/>
+                <a:latin typeface="Pretendard" pitchFamily="34" charset="0"/>
+                <a:ea typeface="Pretendard" pitchFamily="34" charset="-122"/>
+                <a:cs typeface="Pretendard" pitchFamily="34" charset="-120"/>
               </a:rPr>
               <a:t>↓</a:t>
             </a:r>
@@ -6896,9 +6896,9 @@
                 <a:solidFill>
                   <a:srgbClr val="EDE7F6"/>
                 </a:solidFill>
-                <a:latin typeface="Malgun Gothic" pitchFamily="34" charset="0"/>
-                <a:ea typeface="Malgun Gothic" pitchFamily="34" charset="-122"/>
-                <a:cs typeface="Malgun Gothic" pitchFamily="34" charset="-120"/>
+                <a:latin typeface="Pretendard" pitchFamily="34" charset="0"/>
+                <a:ea typeface="Pretendard" pitchFamily="34" charset="-122"/>
+                <a:cs typeface="Pretendard" pitchFamily="34" charset="-120"/>
               </a:rPr>
               <a:t>신뢰 — 검색되고 기억되고</a:t>
             </a:r>
@@ -6935,9 +6935,9 @@
                 <a:solidFill>
                   <a:srgbClr val="F0CE72"/>
                 </a:solidFill>
-                <a:latin typeface="Malgun Gothic" pitchFamily="34" charset="0"/>
-                <a:ea typeface="Malgun Gothic" pitchFamily="34" charset="-122"/>
-                <a:cs typeface="Malgun Gothic" pitchFamily="34" charset="-120"/>
+                <a:latin typeface="Pretendard" pitchFamily="34" charset="0"/>
+                <a:ea typeface="Pretendard" pitchFamily="34" charset="-122"/>
+                <a:cs typeface="Pretendard" pitchFamily="34" charset="-120"/>
               </a:rPr>
               <a:t>↓</a:t>
             </a:r>
@@ -7003,9 +7003,9 @@
                 <a:solidFill>
                   <a:srgbClr val="2A1A47"/>
                 </a:solidFill>
-                <a:latin typeface="Malgun Gothic" pitchFamily="34" charset="0"/>
-                <a:ea typeface="Malgun Gothic" pitchFamily="34" charset="-122"/>
-                <a:cs typeface="Malgun Gothic" pitchFamily="34" charset="-120"/>
+                <a:latin typeface="Pretendard" pitchFamily="34" charset="0"/>
+                <a:ea typeface="Pretendard" pitchFamily="34" charset="-122"/>
+                <a:cs typeface="Pretendard" pitchFamily="34" charset="-120"/>
               </a:rPr>
               <a:t>사람이 먼저 찾아옵니다</a:t>
             </a:r>
@@ -7045,9 +7045,9 @@
                 <a:solidFill>
                   <a:srgbClr val="EDE7F6"/>
                 </a:solidFill>
-                <a:latin typeface="Malgun Gothic" pitchFamily="34" charset="0"/>
-                <a:ea typeface="Malgun Gothic" pitchFamily="34" charset="-122"/>
-                <a:cs typeface="Malgun Gothic" pitchFamily="34" charset="-120"/>
+                <a:latin typeface="Pretendard" pitchFamily="34" charset="0"/>
+                <a:ea typeface="Pretendard" pitchFamily="34" charset="-122"/>
+                <a:cs typeface="Pretendard" pitchFamily="34" charset="-120"/>
               </a:rPr>
               <a:t>많은 분들이 ‘콘텐츠’에서 멈춥니다.</a:t>
             </a:r>
@@ -7065,9 +7065,9 @@
                 <a:solidFill>
                   <a:srgbClr val="FFFFFF"/>
                 </a:solidFill>
-                <a:latin typeface="Malgun Gothic" pitchFamily="34" charset="0"/>
-                <a:ea typeface="Malgun Gothic" pitchFamily="34" charset="-122"/>
-                <a:cs typeface="Malgun Gothic" pitchFamily="34" charset="-120"/>
+                <a:latin typeface="Pretendard" pitchFamily="34" charset="0"/>
+                <a:ea typeface="Pretendard" pitchFamily="34" charset="-122"/>
+                <a:cs typeface="Pretendard" pitchFamily="34" charset="-120"/>
               </a:rPr>
               <a:t>이 특강에서는 그다음, 실제로 사람이 모이는 지점까지 이어 드립니다.</a:t>
             </a:r>
@@ -7136,9 +7136,9 @@
                 <a:solidFill>
                   <a:srgbClr val="B8862B"/>
                 </a:solidFill>
-                <a:latin typeface="Malgun Gothic" pitchFamily="34" charset="0"/>
-                <a:ea typeface="Malgun Gothic" pitchFamily="34" charset="-122"/>
-                <a:cs typeface="Malgun Gothic" pitchFamily="34" charset="-120"/>
+                <a:latin typeface="Pretendard" pitchFamily="34" charset="0"/>
+                <a:ea typeface="Pretendard" pitchFamily="34" charset="-122"/>
+                <a:cs typeface="Pretendard" pitchFamily="34" charset="-120"/>
               </a:rPr>
               <a:t>무료특강에서 공개하는 내용</a:t>
             </a:r>
@@ -7178,9 +7178,9 @@
                 <a:solidFill>
                   <a:srgbClr val="2A2138"/>
                 </a:solidFill>
-                <a:latin typeface="Malgun Gothic" pitchFamily="34" charset="0"/>
-                <a:ea typeface="Malgun Gothic" pitchFamily="34" charset="-122"/>
-                <a:cs typeface="Malgun Gothic" pitchFamily="34" charset="-120"/>
+                <a:latin typeface="Pretendard" pitchFamily="34" charset="0"/>
+                <a:ea typeface="Pretendard" pitchFamily="34" charset="-122"/>
+                <a:cs typeface="Pretendard" pitchFamily="34" charset="-120"/>
               </a:rPr>
               <a:t>90분, 이렇게 채워집니다</a:t>
             </a:r>
@@ -7273,9 +7273,9 @@
                 <a:solidFill>
                   <a:srgbClr val="FFFFFF"/>
                 </a:solidFill>
-                <a:latin typeface="Malgun Gothic" pitchFamily="34" charset="0"/>
-                <a:ea typeface="Malgun Gothic" pitchFamily="34" charset="-122"/>
-                <a:cs typeface="Malgun Gothic" pitchFamily="34" charset="-120"/>
+                <a:latin typeface="Pretendard" pitchFamily="34" charset="0"/>
+                <a:ea typeface="Pretendard" pitchFamily="34" charset="-122"/>
+                <a:cs typeface="Pretendard" pitchFamily="34" charset="-120"/>
               </a:rPr>
               <a:t>1부</a:t>
             </a:r>
@@ -7315,9 +7315,9 @@
                 <a:solidFill>
                   <a:srgbClr val="2A2138"/>
                 </a:solidFill>
-                <a:latin typeface="Malgun Gothic" pitchFamily="34" charset="0"/>
-                <a:ea typeface="Malgun Gothic" pitchFamily="34" charset="-122"/>
-                <a:cs typeface="Malgun Gothic" pitchFamily="34" charset="-120"/>
+                <a:latin typeface="Pretendard" pitchFamily="34" charset="0"/>
+                <a:ea typeface="Pretendard" pitchFamily="34" charset="-122"/>
+                <a:cs typeface="Pretendard" pitchFamily="34" charset="-120"/>
               </a:rPr>
               <a:t>AI 시대, 선택받는 웰니스 전문가의 조건</a:t>
             </a:r>
@@ -7361,9 +7361,9 @@
                 <a:solidFill>
                   <a:srgbClr val="544A63"/>
                 </a:solidFill>
-                <a:latin typeface="Malgun Gothic" pitchFamily="34" charset="0"/>
-                <a:ea typeface="Malgun Gothic" pitchFamily="34" charset="-122"/>
-                <a:cs typeface="Malgun Gothic" pitchFamily="34" charset="-120"/>
+                <a:latin typeface="Pretendard" pitchFamily="34" charset="0"/>
+                <a:ea typeface="Pretendard" pitchFamily="34" charset="-122"/>
+                <a:cs typeface="Pretendard" pitchFamily="34" charset="-120"/>
               </a:rPr>
               <a:t>왜 실력파 강사가 온라인에서는 존재감이 없을까</a:t>
             </a:r>
@@ -7385,9 +7385,9 @@
                 <a:solidFill>
                   <a:srgbClr val="544A63"/>
                 </a:solidFill>
-                <a:latin typeface="Malgun Gothic" pitchFamily="34" charset="0"/>
-                <a:ea typeface="Malgun Gothic" pitchFamily="34" charset="-122"/>
-                <a:cs typeface="Malgun Gothic" pitchFamily="34" charset="-120"/>
+                <a:latin typeface="Pretendard" pitchFamily="34" charset="0"/>
+                <a:ea typeface="Pretendard" pitchFamily="34" charset="-122"/>
+                <a:cs typeface="Pretendard" pitchFamily="34" charset="-120"/>
               </a:rPr>
               <a:t>검색되고 기억되는 브랜드 정체성 설계법</a:t>
             </a:r>
@@ -7480,9 +7480,9 @@
                 <a:solidFill>
                   <a:srgbClr val="FFFFFF"/>
                 </a:solidFill>
-                <a:latin typeface="Malgun Gothic" pitchFamily="34" charset="0"/>
-                <a:ea typeface="Malgun Gothic" pitchFamily="34" charset="-122"/>
-                <a:cs typeface="Malgun Gothic" pitchFamily="34" charset="-120"/>
+                <a:latin typeface="Pretendard" pitchFamily="34" charset="0"/>
+                <a:ea typeface="Pretendard" pitchFamily="34" charset="-122"/>
+                <a:cs typeface="Pretendard" pitchFamily="34" charset="-120"/>
               </a:rPr>
               <a:t>2부</a:t>
             </a:r>
@@ -7522,9 +7522,9 @@
                 <a:solidFill>
                   <a:srgbClr val="2A2138"/>
                 </a:solidFill>
-                <a:latin typeface="Malgun Gothic" pitchFamily="34" charset="0"/>
-                <a:ea typeface="Malgun Gothic" pitchFamily="34" charset="-122"/>
-                <a:cs typeface="Malgun Gothic" pitchFamily="34" charset="-120"/>
+                <a:latin typeface="Pretendard" pitchFamily="34" charset="0"/>
+                <a:ea typeface="Pretendard" pitchFamily="34" charset="-122"/>
+                <a:cs typeface="Pretendard" pitchFamily="34" charset="-120"/>
               </a:rPr>
               <a:t>웰니스 맞춤형 AI 콘텐츠 활용법</a:t>
             </a:r>
@@ -7568,9 +7568,9 @@
                 <a:solidFill>
                   <a:srgbClr val="544A63"/>
                 </a:solidFill>
-                <a:latin typeface="Malgun Gothic" pitchFamily="34" charset="0"/>
-                <a:ea typeface="Malgun Gothic" pitchFamily="34" charset="-122"/>
-                <a:cs typeface="Malgun Gothic" pitchFamily="34" charset="-120"/>
+                <a:latin typeface="Pretendard" pitchFamily="34" charset="0"/>
+                <a:ea typeface="Pretendard" pitchFamily="34" charset="-122"/>
+                <a:cs typeface="Pretendard" pitchFamily="34" charset="-120"/>
               </a:rPr>
               <a:t>AI를 ‘나만의 마케팅 비서’로 세팅하는 프롬프트 구조</a:t>
             </a:r>
@@ -7592,9 +7592,9 @@
                 <a:solidFill>
                   <a:srgbClr val="544A63"/>
                 </a:solidFill>
-                <a:latin typeface="Malgun Gothic" pitchFamily="34" charset="0"/>
-                <a:ea typeface="Malgun Gothic" pitchFamily="34" charset="-122"/>
-                <a:cs typeface="Malgun Gothic" pitchFamily="34" charset="-120"/>
+                <a:latin typeface="Pretendard" pitchFamily="34" charset="0"/>
+                <a:ea typeface="Pretendard" pitchFamily="34" charset="-122"/>
+                <a:cs typeface="Pretendard" pitchFamily="34" charset="-120"/>
               </a:rPr>
               <a:t>블로그 글 하나로 인스타·스레드까지 확장하는 원소스 전략</a:t>
             </a:r>
@@ -7687,9 +7687,9 @@
                 <a:solidFill>
                   <a:srgbClr val="FFFFFF"/>
                 </a:solidFill>
-                <a:latin typeface="Malgun Gothic" pitchFamily="34" charset="0"/>
-                <a:ea typeface="Malgun Gothic" pitchFamily="34" charset="-122"/>
-                <a:cs typeface="Malgun Gothic" pitchFamily="34" charset="-120"/>
+                <a:latin typeface="Pretendard" pitchFamily="34" charset="0"/>
+                <a:ea typeface="Pretendard" pitchFamily="34" charset="-122"/>
+                <a:cs typeface="Pretendard" pitchFamily="34" charset="-120"/>
               </a:rPr>
               <a:t>3부</a:t>
             </a:r>
@@ -7729,9 +7729,9 @@
                 <a:solidFill>
                   <a:srgbClr val="2A2138"/>
                 </a:solidFill>
-                <a:latin typeface="Malgun Gothic" pitchFamily="34" charset="0"/>
-                <a:ea typeface="Malgun Gothic" pitchFamily="34" charset="-122"/>
-                <a:cs typeface="Malgun Gothic" pitchFamily="34" charset="-120"/>
+                <a:latin typeface="Pretendard" pitchFamily="34" charset="0"/>
+                <a:ea typeface="Pretendard" pitchFamily="34" charset="-122"/>
+                <a:cs typeface="Pretendard" pitchFamily="34" charset="-120"/>
               </a:rPr>
               <a:t>사람이 스스로 찾아오게 만드는 신뢰의 구조</a:t>
             </a:r>
@@ -7775,9 +7775,9 @@
                 <a:solidFill>
                   <a:srgbClr val="544A63"/>
                 </a:solidFill>
-                <a:latin typeface="Malgun Gothic" pitchFamily="34" charset="0"/>
-                <a:ea typeface="Malgun Gothic" pitchFamily="34" charset="-122"/>
-                <a:cs typeface="Malgun Gothic" pitchFamily="34" charset="-120"/>
+                <a:latin typeface="Pretendard" pitchFamily="34" charset="0"/>
+                <a:ea typeface="Pretendard" pitchFamily="34" charset="-122"/>
+                <a:cs typeface="Pretendard" pitchFamily="34" charset="-120"/>
               </a:rPr>
               <a:t>콘텐츠가 상담·클래스 신청으로 이어지는 흐름 설계</a:t>
             </a:r>
@@ -7799,9 +7799,9 @@
                 <a:solidFill>
                   <a:srgbClr val="544A63"/>
                 </a:solidFill>
-                <a:latin typeface="Malgun Gothic" pitchFamily="34" charset="0"/>
-                <a:ea typeface="Malgun Gothic" pitchFamily="34" charset="-122"/>
-                <a:cs typeface="Malgun Gothic" pitchFamily="34" charset="-120"/>
+                <a:latin typeface="Pretendard" pitchFamily="34" charset="0"/>
+                <a:ea typeface="Pretendard" pitchFamily="34" charset="-122"/>
+                <a:cs typeface="Pretendard" pitchFamily="34" charset="-120"/>
               </a:rPr>
               <a:t>일반 SNS 마케팅과 웰니스 마케팅은 무엇이 다른가</a:t>
             </a:r>
@@ -7870,9 +7870,9 @@
                 <a:solidFill>
                   <a:srgbClr val="B8862B"/>
                 </a:solidFill>
-                <a:latin typeface="Malgun Gothic" pitchFamily="34" charset="0"/>
-                <a:ea typeface="Malgun Gothic" pitchFamily="34" charset="-122"/>
-                <a:cs typeface="Malgun Gothic" pitchFamily="34" charset="-120"/>
+                <a:latin typeface="Pretendard" pitchFamily="34" charset="0"/>
+                <a:ea typeface="Pretendard" pitchFamily="34" charset="-122"/>
+                <a:cs typeface="Pretendard" pitchFamily="34" charset="-120"/>
               </a:rPr>
               <a:t>강사 소개</a:t>
             </a:r>
@@ -7912,9 +7912,9 @@
                 <a:solidFill>
                   <a:srgbClr val="2A2138"/>
                 </a:solidFill>
-                <a:latin typeface="Malgun Gothic" pitchFamily="34" charset="0"/>
-                <a:ea typeface="Malgun Gothic" pitchFamily="34" charset="-122"/>
-                <a:cs typeface="Malgun Gothic" pitchFamily="34" charset="-120"/>
+                <a:latin typeface="Pretendard" pitchFamily="34" charset="0"/>
+                <a:ea typeface="Pretendard" pitchFamily="34" charset="-122"/>
+                <a:cs typeface="Pretendard" pitchFamily="34" charset="-120"/>
               </a:rPr>
               <a:t>마케팅 현장에서 뛰고 있으면서</a:t>
             </a:r>
@@ -7932,9 +7932,9 @@
                 <a:solidFill>
                   <a:srgbClr val="2A2138"/>
                 </a:solidFill>
-                <a:latin typeface="Malgun Gothic" pitchFamily="34" charset="0"/>
-                <a:ea typeface="Malgun Gothic" pitchFamily="34" charset="-122"/>
-                <a:cs typeface="Malgun Gothic" pitchFamily="34" charset="-120"/>
+                <a:latin typeface="Pretendard" pitchFamily="34" charset="0"/>
+                <a:ea typeface="Pretendard" pitchFamily="34" charset="-122"/>
+                <a:cs typeface="Pretendard" pitchFamily="34" charset="-120"/>
               </a:rPr>
               <a:t>동시에 웰니스 세계를 깊이 이해하는 사람</a:t>
             </a:r>
@@ -8020,9 +8020,9 @@
                 <a:solidFill>
                   <a:srgbClr val="E7DAFB"/>
                 </a:solidFill>
-                <a:latin typeface="Malgun Gothic" pitchFamily="34" charset="0"/>
-                <a:ea typeface="Malgun Gothic" pitchFamily="34" charset="-122"/>
-                <a:cs typeface="Malgun Gothic" pitchFamily="34" charset="-120"/>
+                <a:latin typeface="Pretendard" pitchFamily="34" charset="0"/>
+                <a:ea typeface="Pretendard" pitchFamily="34" charset="-122"/>
+                <a:cs typeface="Pretendard" pitchFamily="34" charset="-120"/>
               </a:rPr>
               <a:t>강사 사진</a:t>
             </a:r>
@@ -8037,9 +8037,9 @@
                 <a:solidFill>
                   <a:srgbClr val="E7DAFB"/>
                 </a:solidFill>
-                <a:latin typeface="Malgun Gothic" pitchFamily="34" charset="0"/>
-                <a:ea typeface="Malgun Gothic" pitchFamily="34" charset="-122"/>
-                <a:cs typeface="Malgun Gothic" pitchFamily="34" charset="-120"/>
+                <a:latin typeface="Pretendard" pitchFamily="34" charset="0"/>
+                <a:ea typeface="Pretendard" pitchFamily="34" charset="-122"/>
+                <a:cs typeface="Pretendard" pitchFamily="34" charset="-120"/>
               </a:rPr>
               <a:t>(교체 예정)</a:t>
             </a:r>
@@ -8076,9 +8076,9 @@
                 <a:solidFill>
                   <a:srgbClr val="B8862B"/>
                 </a:solidFill>
-                <a:latin typeface="Malgun Gothic" pitchFamily="34" charset="0"/>
-                <a:ea typeface="Malgun Gothic" pitchFamily="34" charset="-122"/>
-                <a:cs typeface="Malgun Gothic" pitchFamily="34" charset="-120"/>
+                <a:latin typeface="Pretendard" pitchFamily="34" charset="0"/>
+                <a:ea typeface="Pretendard" pitchFamily="34" charset="-122"/>
+                <a:cs typeface="Pretendard" pitchFamily="34" charset="-120"/>
               </a:rPr>
               <a:t>힐링뉴스 대표 · 메디에이치(MEDI.H) 대표</a:t>
             </a:r>
@@ -8115,9 +8115,9 @@
                 <a:solidFill>
                   <a:srgbClr val="2A2138"/>
                 </a:solidFill>
-                <a:latin typeface="Malgun Gothic" pitchFamily="34" charset="0"/>
-                <a:ea typeface="Malgun Gothic" pitchFamily="34" charset="-122"/>
-                <a:cs typeface="Malgun Gothic" pitchFamily="34" charset="-120"/>
+                <a:latin typeface="Pretendard" pitchFamily="34" charset="0"/>
+                <a:ea typeface="Pretendard" pitchFamily="34" charset="-122"/>
+                <a:cs typeface="Pretendard" pitchFamily="34" charset="-120"/>
               </a:rPr>
               <a:t>오혜선 대표</a:t>
             </a:r>
@@ -8129,9 +8129,9 @@
                 <a:solidFill>
                   <a:srgbClr val="544A63"/>
                 </a:solidFill>
-                <a:latin typeface="Malgun Gothic" pitchFamily="34" charset="0"/>
-                <a:ea typeface="Malgun Gothic" pitchFamily="34" charset="-122"/>
-                <a:cs typeface="Malgun Gothic" pitchFamily="34" charset="-120"/>
+                <a:latin typeface="Pretendard" pitchFamily="34" charset="0"/>
+                <a:ea typeface="Pretendard" pitchFamily="34" charset="-122"/>
+                <a:cs typeface="Pretendard" pitchFamily="34" charset="-120"/>
               </a:rPr>
               <a:t>  (Sriya)</a:t>
             </a:r>
@@ -8171,9 +8171,9 @@
                 <a:solidFill>
                   <a:srgbClr val="544A63"/>
                 </a:solidFill>
-                <a:latin typeface="Malgun Gothic" pitchFamily="34" charset="0"/>
-                <a:ea typeface="Malgun Gothic" pitchFamily="34" charset="-122"/>
-                <a:cs typeface="Malgun Gothic" pitchFamily="34" charset="-120"/>
+                <a:latin typeface="Pretendard" pitchFamily="34" charset="0"/>
+                <a:ea typeface="Pretendard" pitchFamily="34" charset="-122"/>
+                <a:cs typeface="Pretendard" pitchFamily="34" charset="-120"/>
               </a:rPr>
               <a:t>웰니스 시장의 언어와 데이터 기반 마케팅을 모두 아는, 국내에서 드문 웰니스 특화 마케팅 교육자.</a:t>
             </a:r>
@@ -8210,9 +8210,9 @@
                 <a:solidFill>
                   <a:srgbClr val="4E2E82"/>
                 </a:solidFill>
-                <a:latin typeface="Malgun Gothic" pitchFamily="34" charset="0"/>
-                <a:ea typeface="Malgun Gothic" pitchFamily="34" charset="-122"/>
-                <a:cs typeface="Malgun Gothic" pitchFamily="34" charset="-120"/>
+                <a:latin typeface="Pretendard" pitchFamily="34" charset="0"/>
+                <a:ea typeface="Pretendard" pitchFamily="34" charset="-122"/>
+                <a:cs typeface="Pretendard" pitchFamily="34" charset="-120"/>
               </a:rPr>
               <a:t>언론</a:t>
             </a:r>
@@ -8252,9 +8252,9 @@
                 <a:solidFill>
                   <a:srgbClr val="2A2138"/>
                 </a:solidFill>
-                <a:latin typeface="Malgun Gothic" pitchFamily="34" charset="0"/>
-                <a:ea typeface="Malgun Gothic" pitchFamily="34" charset="-122"/>
-                <a:cs typeface="Malgun Gothic" pitchFamily="34" charset="-120"/>
+                <a:latin typeface="Pretendard" pitchFamily="34" charset="0"/>
+                <a:ea typeface="Pretendard" pitchFamily="34" charset="-122"/>
+                <a:cs typeface="Pretendard" pitchFamily="34" charset="-120"/>
               </a:rPr>
               <a:t>명상·웰니스 전문 언론사 &lt;힐링뉴스&gt; 대표</a:t>
             </a:r>
@@ -8314,9 +8314,9 @@
                 <a:solidFill>
                   <a:srgbClr val="4E2E82"/>
                 </a:solidFill>
-                <a:latin typeface="Malgun Gothic" pitchFamily="34" charset="0"/>
-                <a:ea typeface="Malgun Gothic" pitchFamily="34" charset="-122"/>
-                <a:cs typeface="Malgun Gothic" pitchFamily="34" charset="-120"/>
+                <a:latin typeface="Pretendard" pitchFamily="34" charset="0"/>
+                <a:ea typeface="Pretendard" pitchFamily="34" charset="-122"/>
+                <a:cs typeface="Pretendard" pitchFamily="34" charset="-120"/>
               </a:rPr>
               <a:t>자격</a:t>
             </a:r>
@@ -8356,9 +8356,9 @@
                 <a:solidFill>
                   <a:srgbClr val="2A2138"/>
                 </a:solidFill>
-                <a:latin typeface="Malgun Gothic" pitchFamily="34" charset="0"/>
-                <a:ea typeface="Malgun Gothic" pitchFamily="34" charset="-122"/>
-                <a:cs typeface="Malgun Gothic" pitchFamily="34" charset="-120"/>
+                <a:latin typeface="Pretendard" pitchFamily="34" charset="0"/>
+                <a:ea typeface="Pretendard" pitchFamily="34" charset="-122"/>
+                <a:cs typeface="Pretendard" pitchFamily="34" charset="-120"/>
               </a:rPr>
               <a:t>초프라(Chopra) 국제 코치 자격 취득 · 미국 NBHWC 과정 수료</a:t>
             </a:r>
@@ -8418,9 +8418,9 @@
                 <a:solidFill>
                   <a:srgbClr val="4E2E82"/>
                 </a:solidFill>
-                <a:latin typeface="Malgun Gothic" pitchFamily="34" charset="0"/>
-                <a:ea typeface="Malgun Gothic" pitchFamily="34" charset="-122"/>
-                <a:cs typeface="Malgun Gothic" pitchFamily="34" charset="-120"/>
+                <a:latin typeface="Pretendard" pitchFamily="34" charset="0"/>
+                <a:ea typeface="Pretendard" pitchFamily="34" charset="-122"/>
+                <a:cs typeface="Pretendard" pitchFamily="34" charset="-120"/>
               </a:rPr>
               <a:t>마케팅</a:t>
             </a:r>
@@ -8460,9 +8460,9 @@
                 <a:solidFill>
                   <a:srgbClr val="2A2138"/>
                 </a:solidFill>
-                <a:latin typeface="Malgun Gothic" pitchFamily="34" charset="0"/>
-                <a:ea typeface="Malgun Gothic" pitchFamily="34" charset="-122"/>
-                <a:cs typeface="Malgun Gothic" pitchFamily="34" charset="-120"/>
+                <a:latin typeface="Pretendard" pitchFamily="34" charset="0"/>
+                <a:ea typeface="Pretendard" pitchFamily="34" charset="-122"/>
+                <a:cs typeface="Pretendard" pitchFamily="34" charset="-120"/>
               </a:rPr>
               <a:t>메디컬·헬스케어 마케팅 기획사 MEDI.H 대표 · 기업 마케팅 6년</a:t>
             </a:r>
@@ -8522,9 +8522,9 @@
                 <a:solidFill>
                   <a:srgbClr val="4E2E82"/>
                 </a:solidFill>
-                <a:latin typeface="Malgun Gothic" pitchFamily="34" charset="0"/>
-                <a:ea typeface="Malgun Gothic" pitchFamily="34" charset="-122"/>
-                <a:cs typeface="Malgun Gothic" pitchFamily="34" charset="-120"/>
+                <a:latin typeface="Pretendard" pitchFamily="34" charset="0"/>
+                <a:ea typeface="Pretendard" pitchFamily="34" charset="-122"/>
+                <a:cs typeface="Pretendard" pitchFamily="34" charset="-120"/>
               </a:rPr>
               <a:t>교육</a:t>
             </a:r>
@@ -8564,9 +8564,9 @@
                 <a:solidFill>
                   <a:srgbClr val="2A2138"/>
                 </a:solidFill>
-                <a:latin typeface="Malgun Gothic" pitchFamily="34" charset="0"/>
-                <a:ea typeface="Malgun Gothic" pitchFamily="34" charset="-122"/>
-                <a:cs typeface="Malgun Gothic" pitchFamily="34" charset="-120"/>
+                <a:latin typeface="Pretendard" pitchFamily="34" charset="0"/>
+                <a:ea typeface="Pretendard" pitchFamily="34" charset="-122"/>
+                <a:cs typeface="Pretendard" pitchFamily="34" charset="-120"/>
               </a:rPr>
               <a:t>4년간 1,000명 이상을 직접 교육한 실전 마케팅 교육자</a:t>
             </a:r>
@@ -8626,9 +8626,9 @@
                 <a:solidFill>
                   <a:srgbClr val="4E2E82"/>
                 </a:solidFill>
-                <a:latin typeface="Malgun Gothic" pitchFamily="34" charset="0"/>
-                <a:ea typeface="Malgun Gothic" pitchFamily="34" charset="-122"/>
-                <a:cs typeface="Malgun Gothic" pitchFamily="34" charset="-120"/>
+                <a:latin typeface="Pretendard" pitchFamily="34" charset="0"/>
+                <a:ea typeface="Pretendard" pitchFamily="34" charset="-122"/>
+                <a:cs typeface="Pretendard" pitchFamily="34" charset="-120"/>
               </a:rPr>
               <a:t>저술</a:t>
             </a:r>
@@ -8668,9 +8668,9 @@
                 <a:solidFill>
                   <a:srgbClr val="2A2138"/>
                 </a:solidFill>
-                <a:latin typeface="Malgun Gothic" pitchFamily="34" charset="0"/>
-                <a:ea typeface="Malgun Gothic" pitchFamily="34" charset="-122"/>
-                <a:cs typeface="Malgun Gothic" pitchFamily="34" charset="-120"/>
+                <a:latin typeface="Pretendard" pitchFamily="34" charset="0"/>
+                <a:ea typeface="Pretendard" pitchFamily="34" charset="-122"/>
+                <a:cs typeface="Pretendard" pitchFamily="34" charset="-120"/>
               </a:rPr>
               <a:t>저서 5권 출간 · 국가연구자 등록 (전 과학기술인)</a:t>
             </a:r>
@@ -8730,9 +8730,9 @@
                 <a:solidFill>
                   <a:srgbClr val="4E2E82"/>
                 </a:solidFill>
-                <a:latin typeface="Malgun Gothic" pitchFamily="34" charset="0"/>
-                <a:ea typeface="Malgun Gothic" pitchFamily="34" charset="-122"/>
-                <a:cs typeface="Malgun Gothic" pitchFamily="34" charset="-120"/>
+                <a:latin typeface="Pretendard" pitchFamily="34" charset="0"/>
+                <a:ea typeface="Pretendard" pitchFamily="34" charset="-122"/>
+                <a:cs typeface="Pretendard" pitchFamily="34" charset="-120"/>
               </a:rPr>
               <a:t>공공</a:t>
             </a:r>
@@ -8772,9 +8772,9 @@
                 <a:solidFill>
                   <a:srgbClr val="2A2138"/>
                 </a:solidFill>
-                <a:latin typeface="Malgun Gothic" pitchFamily="34" charset="0"/>
-                <a:ea typeface="Malgun Gothic" pitchFamily="34" charset="-122"/>
-                <a:cs typeface="Malgun Gothic" pitchFamily="34" charset="-120"/>
+                <a:latin typeface="Pretendard" pitchFamily="34" charset="0"/>
+                <a:ea typeface="Pretendard" pitchFamily="34" charset="-122"/>
+                <a:cs typeface="Pretendard" pitchFamily="34" charset="-120"/>
               </a:rPr>
               <a:t>정보통신산업진흥원(NIPA) 현직 전문평가위원</a:t>
             </a:r>
@@ -8859,9 +8859,9 @@
                 <a:solidFill>
                   <a:srgbClr val="2A2138"/>
                 </a:solidFill>
-                <a:latin typeface="Malgun Gothic" pitchFamily="34" charset="0"/>
-                <a:ea typeface="Malgun Gothic" pitchFamily="34" charset="-122"/>
-                <a:cs typeface="Malgun Gothic" pitchFamily="34" charset="-120"/>
+                <a:latin typeface="Pretendard" pitchFamily="34" charset="0"/>
+                <a:ea typeface="Pretendard" pitchFamily="34" charset="-122"/>
+                <a:cs typeface="Pretendard" pitchFamily="34" charset="-120"/>
               </a:rPr>
               <a:t>“웰니스 현장을 모르면서 마케팅 이론만 가르치지 않습니다. 저는 실제로 언론사와 마케팅 회사를 운영하며, 고객이 무엇에 마음을 여는지 매일 지켜봐 왔습니다. 또한 웰니스 전문가들의 고뇌를 직관하고, 그 고뇌를 덜어드리고자 이 과정을 개설했습니다.”</a:t>
             </a:r>
